--- a/soldier weapon.pptx
+++ b/soldier weapon.pptx
@@ -160,10 +160,9 @@
           </a:lstStyle>
           <a:p>
             <a:r>
-              <a:rPr kumimoji="1" lang="ja-JP" altLang="en-US" smtClean="0"/>
+              <a:rPr kumimoji="1" lang="ja-JP" altLang="en-US"/>
               <a:t>マスター タイトルの書式設定</a:t>
             </a:r>
-            <a:endParaRPr kumimoji="1" lang="ja-JP" altLang="en-US"/>
           </a:p>
         </p:txBody>
       </p:sp>
@@ -225,10 +224,9 @@
           </a:lstStyle>
           <a:p>
             <a:r>
-              <a:rPr kumimoji="1" lang="ja-JP" altLang="en-US" smtClean="0"/>
+              <a:rPr kumimoji="1" lang="ja-JP" altLang="en-US"/>
               <a:t>マスター サブタイトルの書式設定</a:t>
             </a:r>
-            <a:endParaRPr kumimoji="1" lang="ja-JP" altLang="en-US"/>
           </a:p>
         </p:txBody>
       </p:sp>
@@ -249,7 +247,7 @@
           <a:p>
             <a:fld id="{0E085FA6-3BB9-47BA-8D81-299A75D1B58A}" type="datetimeFigureOut">
               <a:rPr kumimoji="1" lang="ja-JP" altLang="en-US" smtClean="0"/>
-              <a:t>2025/3/14</a:t>
+              <a:t>2025/7/29</a:t>
             </a:fld>
             <a:endParaRPr kumimoji="1" lang="ja-JP" altLang="en-US"/>
           </a:p>
@@ -343,10 +341,9 @@
           <a:lstStyle/>
           <a:p>
             <a:r>
-              <a:rPr kumimoji="1" lang="ja-JP" altLang="en-US" smtClean="0"/>
+              <a:rPr kumimoji="1" lang="ja-JP" altLang="en-US"/>
               <a:t>マスター タイトルの書式設定</a:t>
             </a:r>
-            <a:endParaRPr kumimoji="1" lang="ja-JP" altLang="en-US"/>
           </a:p>
         </p:txBody>
       </p:sp>
@@ -367,70 +364,69 @@
           <a:p>
             <a:pPr lvl="0"/>
             <a:r>
-              <a:rPr kumimoji="1" lang="ja-JP" altLang="en-US" smtClean="0"/>
+              <a:rPr kumimoji="1" lang="ja-JP" altLang="en-US"/>
               <a:t>マスター テキストの書式設定</a:t>
             </a:r>
           </a:p>
           <a:p>
             <a:pPr lvl="1"/>
             <a:r>
-              <a:rPr kumimoji="1" lang="ja-JP" altLang="en-US" smtClean="0"/>
+              <a:rPr kumimoji="1" lang="ja-JP" altLang="en-US"/>
               <a:t>第 </a:t>
             </a:r>
             <a:r>
-              <a:rPr kumimoji="1" lang="en-US" altLang="ja-JP" smtClean="0"/>
+              <a:rPr kumimoji="1" lang="en-US" altLang="ja-JP"/>
               <a:t>2 </a:t>
             </a:r>
             <a:r>
-              <a:rPr kumimoji="1" lang="ja-JP" altLang="en-US" smtClean="0"/>
+              <a:rPr kumimoji="1" lang="ja-JP" altLang="en-US"/>
               <a:t>レベル</a:t>
             </a:r>
           </a:p>
           <a:p>
             <a:pPr lvl="2"/>
             <a:r>
-              <a:rPr kumimoji="1" lang="ja-JP" altLang="en-US" smtClean="0"/>
+              <a:rPr kumimoji="1" lang="ja-JP" altLang="en-US"/>
               <a:t>第 </a:t>
             </a:r>
             <a:r>
-              <a:rPr kumimoji="1" lang="en-US" altLang="ja-JP" smtClean="0"/>
+              <a:rPr kumimoji="1" lang="en-US" altLang="ja-JP"/>
               <a:t>3 </a:t>
             </a:r>
             <a:r>
-              <a:rPr kumimoji="1" lang="ja-JP" altLang="en-US" smtClean="0"/>
+              <a:rPr kumimoji="1" lang="ja-JP" altLang="en-US"/>
               <a:t>レベル</a:t>
             </a:r>
           </a:p>
           <a:p>
             <a:pPr lvl="3"/>
             <a:r>
-              <a:rPr kumimoji="1" lang="ja-JP" altLang="en-US" smtClean="0"/>
+              <a:rPr kumimoji="1" lang="ja-JP" altLang="en-US"/>
               <a:t>第 </a:t>
             </a:r>
             <a:r>
-              <a:rPr kumimoji="1" lang="en-US" altLang="ja-JP" smtClean="0"/>
+              <a:rPr kumimoji="1" lang="en-US" altLang="ja-JP"/>
               <a:t>4 </a:t>
             </a:r>
             <a:r>
-              <a:rPr kumimoji="1" lang="ja-JP" altLang="en-US" smtClean="0"/>
+              <a:rPr kumimoji="1" lang="ja-JP" altLang="en-US"/>
               <a:t>レベル</a:t>
             </a:r>
           </a:p>
           <a:p>
             <a:pPr lvl="4"/>
             <a:r>
-              <a:rPr kumimoji="1" lang="ja-JP" altLang="en-US" smtClean="0"/>
+              <a:rPr kumimoji="1" lang="ja-JP" altLang="en-US"/>
               <a:t>第 </a:t>
             </a:r>
             <a:r>
-              <a:rPr kumimoji="1" lang="en-US" altLang="ja-JP" smtClean="0"/>
+              <a:rPr kumimoji="1" lang="en-US" altLang="ja-JP"/>
               <a:t>5 </a:t>
             </a:r>
             <a:r>
-              <a:rPr kumimoji="1" lang="ja-JP" altLang="en-US" smtClean="0"/>
+              <a:rPr kumimoji="1" lang="ja-JP" altLang="en-US"/>
               <a:t>レベル</a:t>
             </a:r>
-            <a:endParaRPr kumimoji="1" lang="ja-JP" altLang="en-US"/>
           </a:p>
         </p:txBody>
       </p:sp>
@@ -451,7 +447,7 @@
           <a:p>
             <a:fld id="{0E085FA6-3BB9-47BA-8D81-299A75D1B58A}" type="datetimeFigureOut">
               <a:rPr kumimoji="1" lang="ja-JP" altLang="en-US" smtClean="0"/>
-              <a:t>2025/3/14</a:t>
+              <a:t>2025/7/29</a:t>
             </a:fld>
             <a:endParaRPr kumimoji="1" lang="ja-JP" altLang="en-US"/>
           </a:p>
@@ -550,10 +546,9 @@
           <a:lstStyle/>
           <a:p>
             <a:r>
-              <a:rPr kumimoji="1" lang="ja-JP" altLang="en-US" smtClean="0"/>
+              <a:rPr kumimoji="1" lang="ja-JP" altLang="en-US"/>
               <a:t>マスター タイトルの書式設定</a:t>
             </a:r>
-            <a:endParaRPr kumimoji="1" lang="ja-JP" altLang="en-US"/>
           </a:p>
         </p:txBody>
       </p:sp>
@@ -579,70 +574,69 @@
           <a:p>
             <a:pPr lvl="0"/>
             <a:r>
-              <a:rPr kumimoji="1" lang="ja-JP" altLang="en-US" smtClean="0"/>
+              <a:rPr kumimoji="1" lang="ja-JP" altLang="en-US"/>
               <a:t>マスター テキストの書式設定</a:t>
             </a:r>
           </a:p>
           <a:p>
             <a:pPr lvl="1"/>
             <a:r>
-              <a:rPr kumimoji="1" lang="ja-JP" altLang="en-US" smtClean="0"/>
+              <a:rPr kumimoji="1" lang="ja-JP" altLang="en-US"/>
               <a:t>第 </a:t>
             </a:r>
             <a:r>
-              <a:rPr kumimoji="1" lang="en-US" altLang="ja-JP" smtClean="0"/>
+              <a:rPr kumimoji="1" lang="en-US" altLang="ja-JP"/>
               <a:t>2 </a:t>
             </a:r>
             <a:r>
-              <a:rPr kumimoji="1" lang="ja-JP" altLang="en-US" smtClean="0"/>
+              <a:rPr kumimoji="1" lang="ja-JP" altLang="en-US"/>
               <a:t>レベル</a:t>
             </a:r>
           </a:p>
           <a:p>
             <a:pPr lvl="2"/>
             <a:r>
-              <a:rPr kumimoji="1" lang="ja-JP" altLang="en-US" smtClean="0"/>
+              <a:rPr kumimoji="1" lang="ja-JP" altLang="en-US"/>
               <a:t>第 </a:t>
             </a:r>
             <a:r>
-              <a:rPr kumimoji="1" lang="en-US" altLang="ja-JP" smtClean="0"/>
+              <a:rPr kumimoji="1" lang="en-US" altLang="ja-JP"/>
               <a:t>3 </a:t>
             </a:r>
             <a:r>
-              <a:rPr kumimoji="1" lang="ja-JP" altLang="en-US" smtClean="0"/>
+              <a:rPr kumimoji="1" lang="ja-JP" altLang="en-US"/>
               <a:t>レベル</a:t>
             </a:r>
           </a:p>
           <a:p>
             <a:pPr lvl="3"/>
             <a:r>
-              <a:rPr kumimoji="1" lang="ja-JP" altLang="en-US" smtClean="0"/>
+              <a:rPr kumimoji="1" lang="ja-JP" altLang="en-US"/>
               <a:t>第 </a:t>
             </a:r>
             <a:r>
-              <a:rPr kumimoji="1" lang="en-US" altLang="ja-JP" smtClean="0"/>
+              <a:rPr kumimoji="1" lang="en-US" altLang="ja-JP"/>
               <a:t>4 </a:t>
             </a:r>
             <a:r>
-              <a:rPr kumimoji="1" lang="ja-JP" altLang="en-US" smtClean="0"/>
+              <a:rPr kumimoji="1" lang="ja-JP" altLang="en-US"/>
               <a:t>レベル</a:t>
             </a:r>
           </a:p>
           <a:p>
             <a:pPr lvl="4"/>
             <a:r>
-              <a:rPr kumimoji="1" lang="ja-JP" altLang="en-US" smtClean="0"/>
+              <a:rPr kumimoji="1" lang="ja-JP" altLang="en-US"/>
               <a:t>第 </a:t>
             </a:r>
             <a:r>
-              <a:rPr kumimoji="1" lang="en-US" altLang="ja-JP" smtClean="0"/>
+              <a:rPr kumimoji="1" lang="en-US" altLang="ja-JP"/>
               <a:t>5 </a:t>
             </a:r>
             <a:r>
-              <a:rPr kumimoji="1" lang="ja-JP" altLang="en-US" smtClean="0"/>
+              <a:rPr kumimoji="1" lang="ja-JP" altLang="en-US"/>
               <a:t>レベル</a:t>
             </a:r>
-            <a:endParaRPr kumimoji="1" lang="ja-JP" altLang="en-US"/>
           </a:p>
         </p:txBody>
       </p:sp>
@@ -663,7 +657,7 @@
           <a:p>
             <a:fld id="{0E085FA6-3BB9-47BA-8D81-299A75D1B58A}" type="datetimeFigureOut">
               <a:rPr kumimoji="1" lang="ja-JP" altLang="en-US" smtClean="0"/>
-              <a:t>2025/3/14</a:t>
+              <a:t>2025/7/29</a:t>
             </a:fld>
             <a:endParaRPr kumimoji="1" lang="ja-JP" altLang="en-US"/>
           </a:p>
@@ -757,10 +751,9 @@
           <a:lstStyle/>
           <a:p>
             <a:r>
-              <a:rPr kumimoji="1" lang="ja-JP" altLang="en-US" smtClean="0"/>
+              <a:rPr kumimoji="1" lang="ja-JP" altLang="en-US"/>
               <a:t>マスター タイトルの書式設定</a:t>
             </a:r>
-            <a:endParaRPr kumimoji="1" lang="ja-JP" altLang="en-US"/>
           </a:p>
         </p:txBody>
       </p:sp>
@@ -781,70 +774,69 @@
           <a:p>
             <a:pPr lvl="0"/>
             <a:r>
-              <a:rPr kumimoji="1" lang="ja-JP" altLang="en-US" smtClean="0"/>
+              <a:rPr kumimoji="1" lang="ja-JP" altLang="en-US"/>
               <a:t>マスター テキストの書式設定</a:t>
             </a:r>
           </a:p>
           <a:p>
             <a:pPr lvl="1"/>
             <a:r>
-              <a:rPr kumimoji="1" lang="ja-JP" altLang="en-US" smtClean="0"/>
+              <a:rPr kumimoji="1" lang="ja-JP" altLang="en-US"/>
               <a:t>第 </a:t>
             </a:r>
             <a:r>
-              <a:rPr kumimoji="1" lang="en-US" altLang="ja-JP" smtClean="0"/>
+              <a:rPr kumimoji="1" lang="en-US" altLang="ja-JP"/>
               <a:t>2 </a:t>
             </a:r>
             <a:r>
-              <a:rPr kumimoji="1" lang="ja-JP" altLang="en-US" smtClean="0"/>
+              <a:rPr kumimoji="1" lang="ja-JP" altLang="en-US"/>
               <a:t>レベル</a:t>
             </a:r>
           </a:p>
           <a:p>
             <a:pPr lvl="2"/>
             <a:r>
-              <a:rPr kumimoji="1" lang="ja-JP" altLang="en-US" smtClean="0"/>
+              <a:rPr kumimoji="1" lang="ja-JP" altLang="en-US"/>
               <a:t>第 </a:t>
             </a:r>
             <a:r>
-              <a:rPr kumimoji="1" lang="en-US" altLang="ja-JP" smtClean="0"/>
+              <a:rPr kumimoji="1" lang="en-US" altLang="ja-JP"/>
               <a:t>3 </a:t>
             </a:r>
             <a:r>
-              <a:rPr kumimoji="1" lang="ja-JP" altLang="en-US" smtClean="0"/>
+              <a:rPr kumimoji="1" lang="ja-JP" altLang="en-US"/>
               <a:t>レベル</a:t>
             </a:r>
           </a:p>
           <a:p>
             <a:pPr lvl="3"/>
             <a:r>
-              <a:rPr kumimoji="1" lang="ja-JP" altLang="en-US" smtClean="0"/>
+              <a:rPr kumimoji="1" lang="ja-JP" altLang="en-US"/>
               <a:t>第 </a:t>
             </a:r>
             <a:r>
-              <a:rPr kumimoji="1" lang="en-US" altLang="ja-JP" smtClean="0"/>
+              <a:rPr kumimoji="1" lang="en-US" altLang="ja-JP"/>
               <a:t>4 </a:t>
             </a:r>
             <a:r>
-              <a:rPr kumimoji="1" lang="ja-JP" altLang="en-US" smtClean="0"/>
+              <a:rPr kumimoji="1" lang="ja-JP" altLang="en-US"/>
               <a:t>レベル</a:t>
             </a:r>
           </a:p>
           <a:p>
             <a:pPr lvl="4"/>
             <a:r>
-              <a:rPr kumimoji="1" lang="ja-JP" altLang="en-US" smtClean="0"/>
+              <a:rPr kumimoji="1" lang="ja-JP" altLang="en-US"/>
               <a:t>第 </a:t>
             </a:r>
             <a:r>
-              <a:rPr kumimoji="1" lang="en-US" altLang="ja-JP" smtClean="0"/>
+              <a:rPr kumimoji="1" lang="en-US" altLang="ja-JP"/>
               <a:t>5 </a:t>
             </a:r>
             <a:r>
-              <a:rPr kumimoji="1" lang="ja-JP" altLang="en-US" smtClean="0"/>
+              <a:rPr kumimoji="1" lang="ja-JP" altLang="en-US"/>
               <a:t>レベル</a:t>
             </a:r>
-            <a:endParaRPr kumimoji="1" lang="ja-JP" altLang="en-US"/>
           </a:p>
         </p:txBody>
       </p:sp>
@@ -865,7 +857,7 @@
           <a:p>
             <a:fld id="{0E085FA6-3BB9-47BA-8D81-299A75D1B58A}" type="datetimeFigureOut">
               <a:rPr kumimoji="1" lang="ja-JP" altLang="en-US" smtClean="0"/>
-              <a:t>2025/3/14</a:t>
+              <a:t>2025/7/29</a:t>
             </a:fld>
             <a:endParaRPr kumimoji="1" lang="ja-JP" altLang="en-US"/>
           </a:p>
@@ -968,10 +960,9 @@
           </a:lstStyle>
           <a:p>
             <a:r>
-              <a:rPr kumimoji="1" lang="ja-JP" altLang="en-US" smtClean="0"/>
+              <a:rPr kumimoji="1" lang="ja-JP" altLang="en-US"/>
               <a:t>マスター タイトルの書式設定</a:t>
             </a:r>
-            <a:endParaRPr kumimoji="1" lang="ja-JP" altLang="en-US"/>
           </a:p>
         </p:txBody>
       </p:sp>
@@ -1088,7 +1079,7 @@
           <a:p>
             <a:pPr lvl="0"/>
             <a:r>
-              <a:rPr kumimoji="1" lang="ja-JP" altLang="en-US" smtClean="0"/>
+              <a:rPr kumimoji="1" lang="ja-JP" altLang="en-US"/>
               <a:t>マスター テキストの書式設定</a:t>
             </a:r>
           </a:p>
@@ -1111,7 +1102,7 @@
           <a:p>
             <a:fld id="{0E085FA6-3BB9-47BA-8D81-299A75D1B58A}" type="datetimeFigureOut">
               <a:rPr kumimoji="1" lang="ja-JP" altLang="en-US" smtClean="0"/>
-              <a:t>2025/3/14</a:t>
+              <a:t>2025/7/29</a:t>
             </a:fld>
             <a:endParaRPr kumimoji="1" lang="ja-JP" altLang="en-US"/>
           </a:p>
@@ -1205,10 +1196,9 @@
           <a:lstStyle/>
           <a:p>
             <a:r>
-              <a:rPr kumimoji="1" lang="ja-JP" altLang="en-US" smtClean="0"/>
+              <a:rPr kumimoji="1" lang="ja-JP" altLang="en-US"/>
               <a:t>マスター タイトルの書式設定</a:t>
             </a:r>
-            <a:endParaRPr kumimoji="1" lang="ja-JP" altLang="en-US"/>
           </a:p>
         </p:txBody>
       </p:sp>
@@ -1234,70 +1224,69 @@
           <a:p>
             <a:pPr lvl="0"/>
             <a:r>
-              <a:rPr kumimoji="1" lang="ja-JP" altLang="en-US" smtClean="0"/>
+              <a:rPr kumimoji="1" lang="ja-JP" altLang="en-US"/>
               <a:t>マスター テキストの書式設定</a:t>
             </a:r>
           </a:p>
           <a:p>
             <a:pPr lvl="1"/>
             <a:r>
-              <a:rPr kumimoji="1" lang="ja-JP" altLang="en-US" smtClean="0"/>
+              <a:rPr kumimoji="1" lang="ja-JP" altLang="en-US"/>
               <a:t>第 </a:t>
             </a:r>
             <a:r>
-              <a:rPr kumimoji="1" lang="en-US" altLang="ja-JP" smtClean="0"/>
+              <a:rPr kumimoji="1" lang="en-US" altLang="ja-JP"/>
               <a:t>2 </a:t>
             </a:r>
             <a:r>
-              <a:rPr kumimoji="1" lang="ja-JP" altLang="en-US" smtClean="0"/>
+              <a:rPr kumimoji="1" lang="ja-JP" altLang="en-US"/>
               <a:t>レベル</a:t>
             </a:r>
           </a:p>
           <a:p>
             <a:pPr lvl="2"/>
             <a:r>
-              <a:rPr kumimoji="1" lang="ja-JP" altLang="en-US" smtClean="0"/>
+              <a:rPr kumimoji="1" lang="ja-JP" altLang="en-US"/>
               <a:t>第 </a:t>
             </a:r>
             <a:r>
-              <a:rPr kumimoji="1" lang="en-US" altLang="ja-JP" smtClean="0"/>
+              <a:rPr kumimoji="1" lang="en-US" altLang="ja-JP"/>
               <a:t>3 </a:t>
             </a:r>
             <a:r>
-              <a:rPr kumimoji="1" lang="ja-JP" altLang="en-US" smtClean="0"/>
+              <a:rPr kumimoji="1" lang="ja-JP" altLang="en-US"/>
               <a:t>レベル</a:t>
             </a:r>
           </a:p>
           <a:p>
             <a:pPr lvl="3"/>
             <a:r>
-              <a:rPr kumimoji="1" lang="ja-JP" altLang="en-US" smtClean="0"/>
+              <a:rPr kumimoji="1" lang="ja-JP" altLang="en-US"/>
               <a:t>第 </a:t>
             </a:r>
             <a:r>
-              <a:rPr kumimoji="1" lang="en-US" altLang="ja-JP" smtClean="0"/>
+              <a:rPr kumimoji="1" lang="en-US" altLang="ja-JP"/>
               <a:t>4 </a:t>
             </a:r>
             <a:r>
-              <a:rPr kumimoji="1" lang="ja-JP" altLang="en-US" smtClean="0"/>
+              <a:rPr kumimoji="1" lang="ja-JP" altLang="en-US"/>
               <a:t>レベル</a:t>
             </a:r>
           </a:p>
           <a:p>
             <a:pPr lvl="4"/>
             <a:r>
-              <a:rPr kumimoji="1" lang="ja-JP" altLang="en-US" smtClean="0"/>
+              <a:rPr kumimoji="1" lang="ja-JP" altLang="en-US"/>
               <a:t>第 </a:t>
             </a:r>
             <a:r>
-              <a:rPr kumimoji="1" lang="en-US" altLang="ja-JP" smtClean="0"/>
+              <a:rPr kumimoji="1" lang="en-US" altLang="ja-JP"/>
               <a:t>5 </a:t>
             </a:r>
             <a:r>
-              <a:rPr kumimoji="1" lang="ja-JP" altLang="en-US" smtClean="0"/>
+              <a:rPr kumimoji="1" lang="ja-JP" altLang="en-US"/>
               <a:t>レベル</a:t>
             </a:r>
-            <a:endParaRPr kumimoji="1" lang="ja-JP" altLang="en-US"/>
           </a:p>
         </p:txBody>
       </p:sp>
@@ -1323,70 +1312,69 @@
           <a:p>
             <a:pPr lvl="0"/>
             <a:r>
-              <a:rPr kumimoji="1" lang="ja-JP" altLang="en-US" smtClean="0"/>
+              <a:rPr kumimoji="1" lang="ja-JP" altLang="en-US"/>
               <a:t>マスター テキストの書式設定</a:t>
             </a:r>
           </a:p>
           <a:p>
             <a:pPr lvl="1"/>
             <a:r>
-              <a:rPr kumimoji="1" lang="ja-JP" altLang="en-US" smtClean="0"/>
+              <a:rPr kumimoji="1" lang="ja-JP" altLang="en-US"/>
               <a:t>第 </a:t>
             </a:r>
             <a:r>
-              <a:rPr kumimoji="1" lang="en-US" altLang="ja-JP" smtClean="0"/>
+              <a:rPr kumimoji="1" lang="en-US" altLang="ja-JP"/>
               <a:t>2 </a:t>
             </a:r>
             <a:r>
-              <a:rPr kumimoji="1" lang="ja-JP" altLang="en-US" smtClean="0"/>
+              <a:rPr kumimoji="1" lang="ja-JP" altLang="en-US"/>
               <a:t>レベル</a:t>
             </a:r>
           </a:p>
           <a:p>
             <a:pPr lvl="2"/>
             <a:r>
-              <a:rPr kumimoji="1" lang="ja-JP" altLang="en-US" smtClean="0"/>
+              <a:rPr kumimoji="1" lang="ja-JP" altLang="en-US"/>
               <a:t>第 </a:t>
             </a:r>
             <a:r>
-              <a:rPr kumimoji="1" lang="en-US" altLang="ja-JP" smtClean="0"/>
+              <a:rPr kumimoji="1" lang="en-US" altLang="ja-JP"/>
               <a:t>3 </a:t>
             </a:r>
             <a:r>
-              <a:rPr kumimoji="1" lang="ja-JP" altLang="en-US" smtClean="0"/>
+              <a:rPr kumimoji="1" lang="ja-JP" altLang="en-US"/>
               <a:t>レベル</a:t>
             </a:r>
           </a:p>
           <a:p>
             <a:pPr lvl="3"/>
             <a:r>
-              <a:rPr kumimoji="1" lang="ja-JP" altLang="en-US" smtClean="0"/>
+              <a:rPr kumimoji="1" lang="ja-JP" altLang="en-US"/>
               <a:t>第 </a:t>
             </a:r>
             <a:r>
-              <a:rPr kumimoji="1" lang="en-US" altLang="ja-JP" smtClean="0"/>
+              <a:rPr kumimoji="1" lang="en-US" altLang="ja-JP"/>
               <a:t>4 </a:t>
             </a:r>
             <a:r>
-              <a:rPr kumimoji="1" lang="ja-JP" altLang="en-US" smtClean="0"/>
+              <a:rPr kumimoji="1" lang="ja-JP" altLang="en-US"/>
               <a:t>レベル</a:t>
             </a:r>
           </a:p>
           <a:p>
             <a:pPr lvl="4"/>
             <a:r>
-              <a:rPr kumimoji="1" lang="ja-JP" altLang="en-US" smtClean="0"/>
+              <a:rPr kumimoji="1" lang="ja-JP" altLang="en-US"/>
               <a:t>第 </a:t>
             </a:r>
             <a:r>
-              <a:rPr kumimoji="1" lang="en-US" altLang="ja-JP" smtClean="0"/>
+              <a:rPr kumimoji="1" lang="en-US" altLang="ja-JP"/>
               <a:t>5 </a:t>
             </a:r>
             <a:r>
-              <a:rPr kumimoji="1" lang="ja-JP" altLang="en-US" smtClean="0"/>
+              <a:rPr kumimoji="1" lang="ja-JP" altLang="en-US"/>
               <a:t>レベル</a:t>
             </a:r>
-            <a:endParaRPr kumimoji="1" lang="ja-JP" altLang="en-US"/>
           </a:p>
         </p:txBody>
       </p:sp>
@@ -1407,7 +1395,7 @@
           <a:p>
             <a:fld id="{0E085FA6-3BB9-47BA-8D81-299A75D1B58A}" type="datetimeFigureOut">
               <a:rPr kumimoji="1" lang="ja-JP" altLang="en-US" smtClean="0"/>
-              <a:t>2025/3/14</a:t>
+              <a:t>2025/7/29</a:t>
             </a:fld>
             <a:endParaRPr kumimoji="1" lang="ja-JP" altLang="en-US"/>
           </a:p>
@@ -1506,10 +1494,9 @@
           <a:lstStyle/>
           <a:p>
             <a:r>
-              <a:rPr kumimoji="1" lang="ja-JP" altLang="en-US" smtClean="0"/>
+              <a:rPr kumimoji="1" lang="ja-JP" altLang="en-US"/>
               <a:t>マスター タイトルの書式設定</a:t>
             </a:r>
-            <a:endParaRPr kumimoji="1" lang="ja-JP" altLang="en-US"/>
           </a:p>
         </p:txBody>
       </p:sp>
@@ -1572,7 +1559,7 @@
           <a:p>
             <a:pPr lvl="0"/>
             <a:r>
-              <a:rPr kumimoji="1" lang="ja-JP" altLang="en-US" smtClean="0"/>
+              <a:rPr kumimoji="1" lang="ja-JP" altLang="en-US"/>
               <a:t>マスター テキストの書式設定</a:t>
             </a:r>
           </a:p>
@@ -1600,70 +1587,69 @@
           <a:p>
             <a:pPr lvl="0"/>
             <a:r>
-              <a:rPr kumimoji="1" lang="ja-JP" altLang="en-US" smtClean="0"/>
+              <a:rPr kumimoji="1" lang="ja-JP" altLang="en-US"/>
               <a:t>マスター テキストの書式設定</a:t>
             </a:r>
           </a:p>
           <a:p>
             <a:pPr lvl="1"/>
             <a:r>
-              <a:rPr kumimoji="1" lang="ja-JP" altLang="en-US" smtClean="0"/>
+              <a:rPr kumimoji="1" lang="ja-JP" altLang="en-US"/>
               <a:t>第 </a:t>
             </a:r>
             <a:r>
-              <a:rPr kumimoji="1" lang="en-US" altLang="ja-JP" smtClean="0"/>
+              <a:rPr kumimoji="1" lang="en-US" altLang="ja-JP"/>
               <a:t>2 </a:t>
             </a:r>
             <a:r>
-              <a:rPr kumimoji="1" lang="ja-JP" altLang="en-US" smtClean="0"/>
+              <a:rPr kumimoji="1" lang="ja-JP" altLang="en-US"/>
               <a:t>レベル</a:t>
             </a:r>
           </a:p>
           <a:p>
             <a:pPr lvl="2"/>
             <a:r>
-              <a:rPr kumimoji="1" lang="ja-JP" altLang="en-US" smtClean="0"/>
+              <a:rPr kumimoji="1" lang="ja-JP" altLang="en-US"/>
               <a:t>第 </a:t>
             </a:r>
             <a:r>
-              <a:rPr kumimoji="1" lang="en-US" altLang="ja-JP" smtClean="0"/>
+              <a:rPr kumimoji="1" lang="en-US" altLang="ja-JP"/>
               <a:t>3 </a:t>
             </a:r>
             <a:r>
-              <a:rPr kumimoji="1" lang="ja-JP" altLang="en-US" smtClean="0"/>
+              <a:rPr kumimoji="1" lang="ja-JP" altLang="en-US"/>
               <a:t>レベル</a:t>
             </a:r>
           </a:p>
           <a:p>
             <a:pPr lvl="3"/>
             <a:r>
-              <a:rPr kumimoji="1" lang="ja-JP" altLang="en-US" smtClean="0"/>
+              <a:rPr kumimoji="1" lang="ja-JP" altLang="en-US"/>
               <a:t>第 </a:t>
             </a:r>
             <a:r>
-              <a:rPr kumimoji="1" lang="en-US" altLang="ja-JP" smtClean="0"/>
+              <a:rPr kumimoji="1" lang="en-US" altLang="ja-JP"/>
               <a:t>4 </a:t>
             </a:r>
             <a:r>
-              <a:rPr kumimoji="1" lang="ja-JP" altLang="en-US" smtClean="0"/>
+              <a:rPr kumimoji="1" lang="ja-JP" altLang="en-US"/>
               <a:t>レベル</a:t>
             </a:r>
           </a:p>
           <a:p>
             <a:pPr lvl="4"/>
             <a:r>
-              <a:rPr kumimoji="1" lang="ja-JP" altLang="en-US" smtClean="0"/>
+              <a:rPr kumimoji="1" lang="ja-JP" altLang="en-US"/>
               <a:t>第 </a:t>
             </a:r>
             <a:r>
-              <a:rPr kumimoji="1" lang="en-US" altLang="ja-JP" smtClean="0"/>
+              <a:rPr kumimoji="1" lang="en-US" altLang="ja-JP"/>
               <a:t>5 </a:t>
             </a:r>
             <a:r>
-              <a:rPr kumimoji="1" lang="ja-JP" altLang="en-US" smtClean="0"/>
+              <a:rPr kumimoji="1" lang="ja-JP" altLang="en-US"/>
               <a:t>レベル</a:t>
             </a:r>
-            <a:endParaRPr kumimoji="1" lang="ja-JP" altLang="en-US"/>
           </a:p>
         </p:txBody>
       </p:sp>
@@ -1726,7 +1712,7 @@
           <a:p>
             <a:pPr lvl="0"/>
             <a:r>
-              <a:rPr kumimoji="1" lang="ja-JP" altLang="en-US" smtClean="0"/>
+              <a:rPr kumimoji="1" lang="ja-JP" altLang="en-US"/>
               <a:t>マスター テキストの書式設定</a:t>
             </a:r>
           </a:p>
@@ -1754,70 +1740,69 @@
           <a:p>
             <a:pPr lvl="0"/>
             <a:r>
-              <a:rPr kumimoji="1" lang="ja-JP" altLang="en-US" smtClean="0"/>
+              <a:rPr kumimoji="1" lang="ja-JP" altLang="en-US"/>
               <a:t>マスター テキストの書式設定</a:t>
             </a:r>
           </a:p>
           <a:p>
             <a:pPr lvl="1"/>
             <a:r>
-              <a:rPr kumimoji="1" lang="ja-JP" altLang="en-US" smtClean="0"/>
+              <a:rPr kumimoji="1" lang="ja-JP" altLang="en-US"/>
               <a:t>第 </a:t>
             </a:r>
             <a:r>
-              <a:rPr kumimoji="1" lang="en-US" altLang="ja-JP" smtClean="0"/>
+              <a:rPr kumimoji="1" lang="en-US" altLang="ja-JP"/>
               <a:t>2 </a:t>
             </a:r>
             <a:r>
-              <a:rPr kumimoji="1" lang="ja-JP" altLang="en-US" smtClean="0"/>
+              <a:rPr kumimoji="1" lang="ja-JP" altLang="en-US"/>
               <a:t>レベル</a:t>
             </a:r>
           </a:p>
           <a:p>
             <a:pPr lvl="2"/>
             <a:r>
-              <a:rPr kumimoji="1" lang="ja-JP" altLang="en-US" smtClean="0"/>
+              <a:rPr kumimoji="1" lang="ja-JP" altLang="en-US"/>
               <a:t>第 </a:t>
             </a:r>
             <a:r>
-              <a:rPr kumimoji="1" lang="en-US" altLang="ja-JP" smtClean="0"/>
+              <a:rPr kumimoji="1" lang="en-US" altLang="ja-JP"/>
               <a:t>3 </a:t>
             </a:r>
             <a:r>
-              <a:rPr kumimoji="1" lang="ja-JP" altLang="en-US" smtClean="0"/>
+              <a:rPr kumimoji="1" lang="ja-JP" altLang="en-US"/>
               <a:t>レベル</a:t>
             </a:r>
           </a:p>
           <a:p>
             <a:pPr lvl="3"/>
             <a:r>
-              <a:rPr kumimoji="1" lang="ja-JP" altLang="en-US" smtClean="0"/>
+              <a:rPr kumimoji="1" lang="ja-JP" altLang="en-US"/>
               <a:t>第 </a:t>
             </a:r>
             <a:r>
-              <a:rPr kumimoji="1" lang="en-US" altLang="ja-JP" smtClean="0"/>
+              <a:rPr kumimoji="1" lang="en-US" altLang="ja-JP"/>
               <a:t>4 </a:t>
             </a:r>
             <a:r>
-              <a:rPr kumimoji="1" lang="ja-JP" altLang="en-US" smtClean="0"/>
+              <a:rPr kumimoji="1" lang="ja-JP" altLang="en-US"/>
               <a:t>レベル</a:t>
             </a:r>
           </a:p>
           <a:p>
             <a:pPr lvl="4"/>
             <a:r>
-              <a:rPr kumimoji="1" lang="ja-JP" altLang="en-US" smtClean="0"/>
+              <a:rPr kumimoji="1" lang="ja-JP" altLang="en-US"/>
               <a:t>第 </a:t>
             </a:r>
             <a:r>
-              <a:rPr kumimoji="1" lang="en-US" altLang="ja-JP" smtClean="0"/>
+              <a:rPr kumimoji="1" lang="en-US" altLang="ja-JP"/>
               <a:t>5 </a:t>
             </a:r>
             <a:r>
-              <a:rPr kumimoji="1" lang="ja-JP" altLang="en-US" smtClean="0"/>
+              <a:rPr kumimoji="1" lang="ja-JP" altLang="en-US"/>
               <a:t>レベル</a:t>
             </a:r>
-            <a:endParaRPr kumimoji="1" lang="ja-JP" altLang="en-US"/>
           </a:p>
         </p:txBody>
       </p:sp>
@@ -1838,7 +1823,7 @@
           <a:p>
             <a:fld id="{0E085FA6-3BB9-47BA-8D81-299A75D1B58A}" type="datetimeFigureOut">
               <a:rPr kumimoji="1" lang="ja-JP" altLang="en-US" smtClean="0"/>
-              <a:t>2025/3/14</a:t>
+              <a:t>2025/7/29</a:t>
             </a:fld>
             <a:endParaRPr kumimoji="1" lang="ja-JP" altLang="en-US"/>
           </a:p>
@@ -1932,10 +1917,9 @@
           <a:lstStyle/>
           <a:p>
             <a:r>
-              <a:rPr kumimoji="1" lang="ja-JP" altLang="en-US" smtClean="0"/>
+              <a:rPr kumimoji="1" lang="ja-JP" altLang="en-US"/>
               <a:t>マスター タイトルの書式設定</a:t>
             </a:r>
-            <a:endParaRPr kumimoji="1" lang="ja-JP" altLang="en-US"/>
           </a:p>
         </p:txBody>
       </p:sp>
@@ -1956,7 +1940,7 @@
           <a:p>
             <a:fld id="{0E085FA6-3BB9-47BA-8D81-299A75D1B58A}" type="datetimeFigureOut">
               <a:rPr kumimoji="1" lang="ja-JP" altLang="en-US" smtClean="0"/>
-              <a:t>2025/3/14</a:t>
+              <a:t>2025/7/29</a:t>
             </a:fld>
             <a:endParaRPr kumimoji="1" lang="ja-JP" altLang="en-US"/>
           </a:p>
@@ -2051,7 +2035,7 @@
           <a:p>
             <a:fld id="{0E085FA6-3BB9-47BA-8D81-299A75D1B58A}" type="datetimeFigureOut">
               <a:rPr kumimoji="1" lang="ja-JP" altLang="en-US" smtClean="0"/>
-              <a:t>2025/3/14</a:t>
+              <a:t>2025/7/29</a:t>
             </a:fld>
             <a:endParaRPr kumimoji="1" lang="ja-JP" altLang="en-US"/>
           </a:p>
@@ -2154,10 +2138,9 @@
           </a:lstStyle>
           <a:p>
             <a:r>
-              <a:rPr kumimoji="1" lang="ja-JP" altLang="en-US" smtClean="0"/>
+              <a:rPr kumimoji="1" lang="ja-JP" altLang="en-US"/>
               <a:t>マスター タイトルの書式設定</a:t>
             </a:r>
-            <a:endParaRPr kumimoji="1" lang="ja-JP" altLang="en-US"/>
           </a:p>
         </p:txBody>
       </p:sp>
@@ -2211,70 +2194,69 @@
           <a:p>
             <a:pPr lvl="0"/>
             <a:r>
-              <a:rPr kumimoji="1" lang="ja-JP" altLang="en-US" smtClean="0"/>
+              <a:rPr kumimoji="1" lang="ja-JP" altLang="en-US"/>
               <a:t>マスター テキストの書式設定</a:t>
             </a:r>
           </a:p>
           <a:p>
             <a:pPr lvl="1"/>
             <a:r>
-              <a:rPr kumimoji="1" lang="ja-JP" altLang="en-US" smtClean="0"/>
+              <a:rPr kumimoji="1" lang="ja-JP" altLang="en-US"/>
               <a:t>第 </a:t>
             </a:r>
             <a:r>
-              <a:rPr kumimoji="1" lang="en-US" altLang="ja-JP" smtClean="0"/>
+              <a:rPr kumimoji="1" lang="en-US" altLang="ja-JP"/>
               <a:t>2 </a:t>
             </a:r>
             <a:r>
-              <a:rPr kumimoji="1" lang="ja-JP" altLang="en-US" smtClean="0"/>
+              <a:rPr kumimoji="1" lang="ja-JP" altLang="en-US"/>
               <a:t>レベル</a:t>
             </a:r>
           </a:p>
           <a:p>
             <a:pPr lvl="2"/>
             <a:r>
-              <a:rPr kumimoji="1" lang="ja-JP" altLang="en-US" smtClean="0"/>
+              <a:rPr kumimoji="1" lang="ja-JP" altLang="en-US"/>
               <a:t>第 </a:t>
             </a:r>
             <a:r>
-              <a:rPr kumimoji="1" lang="en-US" altLang="ja-JP" smtClean="0"/>
+              <a:rPr kumimoji="1" lang="en-US" altLang="ja-JP"/>
               <a:t>3 </a:t>
             </a:r>
             <a:r>
-              <a:rPr kumimoji="1" lang="ja-JP" altLang="en-US" smtClean="0"/>
+              <a:rPr kumimoji="1" lang="ja-JP" altLang="en-US"/>
               <a:t>レベル</a:t>
             </a:r>
           </a:p>
           <a:p>
             <a:pPr lvl="3"/>
             <a:r>
-              <a:rPr kumimoji="1" lang="ja-JP" altLang="en-US" smtClean="0"/>
+              <a:rPr kumimoji="1" lang="ja-JP" altLang="en-US"/>
               <a:t>第 </a:t>
             </a:r>
             <a:r>
-              <a:rPr kumimoji="1" lang="en-US" altLang="ja-JP" smtClean="0"/>
+              <a:rPr kumimoji="1" lang="en-US" altLang="ja-JP"/>
               <a:t>4 </a:t>
             </a:r>
             <a:r>
-              <a:rPr kumimoji="1" lang="ja-JP" altLang="en-US" smtClean="0"/>
+              <a:rPr kumimoji="1" lang="ja-JP" altLang="en-US"/>
               <a:t>レベル</a:t>
             </a:r>
           </a:p>
           <a:p>
             <a:pPr lvl="4"/>
             <a:r>
-              <a:rPr kumimoji="1" lang="ja-JP" altLang="en-US" smtClean="0"/>
+              <a:rPr kumimoji="1" lang="ja-JP" altLang="en-US"/>
               <a:t>第 </a:t>
             </a:r>
             <a:r>
-              <a:rPr kumimoji="1" lang="en-US" altLang="ja-JP" smtClean="0"/>
+              <a:rPr kumimoji="1" lang="en-US" altLang="ja-JP"/>
               <a:t>5 </a:t>
             </a:r>
             <a:r>
-              <a:rPr kumimoji="1" lang="ja-JP" altLang="en-US" smtClean="0"/>
+              <a:rPr kumimoji="1" lang="ja-JP" altLang="en-US"/>
               <a:t>レベル</a:t>
             </a:r>
-            <a:endParaRPr kumimoji="1" lang="ja-JP" altLang="en-US"/>
           </a:p>
         </p:txBody>
       </p:sp>
@@ -2337,7 +2319,7 @@
           <a:p>
             <a:pPr lvl="0"/>
             <a:r>
-              <a:rPr kumimoji="1" lang="ja-JP" altLang="en-US" smtClean="0"/>
+              <a:rPr kumimoji="1" lang="ja-JP" altLang="en-US"/>
               <a:t>マスター テキストの書式設定</a:t>
             </a:r>
           </a:p>
@@ -2360,7 +2342,7 @@
           <a:p>
             <a:fld id="{0E085FA6-3BB9-47BA-8D81-299A75D1B58A}" type="datetimeFigureOut">
               <a:rPr kumimoji="1" lang="ja-JP" altLang="en-US" smtClean="0"/>
-              <a:t>2025/3/14</a:t>
+              <a:t>2025/7/29</a:t>
             </a:fld>
             <a:endParaRPr kumimoji="1" lang="ja-JP" altLang="en-US"/>
           </a:p>
@@ -2463,10 +2445,9 @@
           </a:lstStyle>
           <a:p>
             <a:r>
-              <a:rPr kumimoji="1" lang="ja-JP" altLang="en-US" smtClean="0"/>
+              <a:rPr kumimoji="1" lang="ja-JP" altLang="en-US"/>
               <a:t>マスター タイトルの書式設定</a:t>
             </a:r>
-            <a:endParaRPr kumimoji="1" lang="ja-JP" altLang="en-US"/>
           </a:p>
         </p:txBody>
       </p:sp>
@@ -2590,7 +2571,7 @@
           <a:p>
             <a:pPr lvl="0"/>
             <a:r>
-              <a:rPr kumimoji="1" lang="ja-JP" altLang="en-US" smtClean="0"/>
+              <a:rPr kumimoji="1" lang="ja-JP" altLang="en-US"/>
               <a:t>マスター テキストの書式設定</a:t>
             </a:r>
           </a:p>
@@ -2613,7 +2594,7 @@
           <a:p>
             <a:fld id="{0E085FA6-3BB9-47BA-8D81-299A75D1B58A}" type="datetimeFigureOut">
               <a:rPr kumimoji="1" lang="ja-JP" altLang="en-US" smtClean="0"/>
-              <a:t>2025/3/14</a:t>
+              <a:t>2025/7/29</a:t>
             </a:fld>
             <a:endParaRPr kumimoji="1" lang="ja-JP" altLang="en-US"/>
           </a:p>
@@ -2722,10 +2703,9 @@
           <a:lstStyle/>
           <a:p>
             <a:r>
-              <a:rPr kumimoji="1" lang="ja-JP" altLang="en-US" smtClean="0"/>
+              <a:rPr kumimoji="1" lang="ja-JP" altLang="en-US"/>
               <a:t>マスター タイトルの書式設定</a:t>
             </a:r>
-            <a:endParaRPr kumimoji="1" lang="ja-JP" altLang="en-US"/>
           </a:p>
         </p:txBody>
       </p:sp>
@@ -2756,70 +2736,69 @@
           <a:p>
             <a:pPr lvl="0"/>
             <a:r>
-              <a:rPr kumimoji="1" lang="ja-JP" altLang="en-US" smtClean="0"/>
+              <a:rPr kumimoji="1" lang="ja-JP" altLang="en-US"/>
               <a:t>マスター テキストの書式設定</a:t>
             </a:r>
           </a:p>
           <a:p>
             <a:pPr lvl="1"/>
             <a:r>
-              <a:rPr kumimoji="1" lang="ja-JP" altLang="en-US" smtClean="0"/>
+              <a:rPr kumimoji="1" lang="ja-JP" altLang="en-US"/>
               <a:t>第 </a:t>
             </a:r>
             <a:r>
-              <a:rPr kumimoji="1" lang="en-US" altLang="ja-JP" smtClean="0"/>
+              <a:rPr kumimoji="1" lang="en-US" altLang="ja-JP"/>
               <a:t>2 </a:t>
             </a:r>
             <a:r>
-              <a:rPr kumimoji="1" lang="ja-JP" altLang="en-US" smtClean="0"/>
+              <a:rPr kumimoji="1" lang="ja-JP" altLang="en-US"/>
               <a:t>レベル</a:t>
             </a:r>
           </a:p>
           <a:p>
             <a:pPr lvl="2"/>
             <a:r>
-              <a:rPr kumimoji="1" lang="ja-JP" altLang="en-US" smtClean="0"/>
+              <a:rPr kumimoji="1" lang="ja-JP" altLang="en-US"/>
               <a:t>第 </a:t>
             </a:r>
             <a:r>
-              <a:rPr kumimoji="1" lang="en-US" altLang="ja-JP" smtClean="0"/>
+              <a:rPr kumimoji="1" lang="en-US" altLang="ja-JP"/>
               <a:t>3 </a:t>
             </a:r>
             <a:r>
-              <a:rPr kumimoji="1" lang="ja-JP" altLang="en-US" smtClean="0"/>
+              <a:rPr kumimoji="1" lang="ja-JP" altLang="en-US"/>
               <a:t>レベル</a:t>
             </a:r>
           </a:p>
           <a:p>
             <a:pPr lvl="3"/>
             <a:r>
-              <a:rPr kumimoji="1" lang="ja-JP" altLang="en-US" smtClean="0"/>
+              <a:rPr kumimoji="1" lang="ja-JP" altLang="en-US"/>
               <a:t>第 </a:t>
             </a:r>
             <a:r>
-              <a:rPr kumimoji="1" lang="en-US" altLang="ja-JP" smtClean="0"/>
+              <a:rPr kumimoji="1" lang="en-US" altLang="ja-JP"/>
               <a:t>4 </a:t>
             </a:r>
             <a:r>
-              <a:rPr kumimoji="1" lang="ja-JP" altLang="en-US" smtClean="0"/>
+              <a:rPr kumimoji="1" lang="ja-JP" altLang="en-US"/>
               <a:t>レベル</a:t>
             </a:r>
           </a:p>
           <a:p>
             <a:pPr lvl="4"/>
             <a:r>
-              <a:rPr kumimoji="1" lang="ja-JP" altLang="en-US" smtClean="0"/>
+              <a:rPr kumimoji="1" lang="ja-JP" altLang="en-US"/>
               <a:t>第 </a:t>
             </a:r>
             <a:r>
-              <a:rPr kumimoji="1" lang="en-US" altLang="ja-JP" smtClean="0"/>
+              <a:rPr kumimoji="1" lang="en-US" altLang="ja-JP"/>
               <a:t>5 </a:t>
             </a:r>
             <a:r>
-              <a:rPr kumimoji="1" lang="ja-JP" altLang="en-US" smtClean="0"/>
+              <a:rPr kumimoji="1" lang="ja-JP" altLang="en-US"/>
               <a:t>レベル</a:t>
             </a:r>
-            <a:endParaRPr kumimoji="1" lang="ja-JP" altLang="en-US"/>
           </a:p>
         </p:txBody>
       </p:sp>
@@ -2858,7 +2837,7 @@
           <a:p>
             <a:fld id="{0E085FA6-3BB9-47BA-8D81-299A75D1B58A}" type="datetimeFigureOut">
               <a:rPr kumimoji="1" lang="ja-JP" altLang="en-US" smtClean="0"/>
-              <a:t>2025/3/14</a:t>
+              <a:t>2025/7/29</a:t>
             </a:fld>
             <a:endParaRPr kumimoji="1" lang="ja-JP" altLang="en-US"/>
           </a:p>
@@ -4127,6 +4106,276 @@
           </a:prstGeom>
         </p:spPr>
       </p:pic>
+      <p:sp>
+        <p:nvSpPr>
+          <p:cNvPr id="2" name="正方形/長方形 1">
+            <a:extLst>
+              <a:ext uri="{FF2B5EF4-FFF2-40B4-BE49-F238E27FC236}">
+                <a16:creationId xmlns:a16="http://schemas.microsoft.com/office/drawing/2014/main" id="{A5B94616-5C50-625D-F400-357CFBE8849C}"/>
+              </a:ext>
+            </a:extLst>
+          </p:cNvPr>
+          <p:cNvSpPr/>
+          <p:nvPr/>
+        </p:nvSpPr>
+        <p:spPr>
+          <a:xfrm>
+            <a:off x="5196168" y="1122960"/>
+            <a:ext cx="1069260" cy="1069260"/>
+          </a:xfrm>
+          <a:prstGeom prst="rect">
+            <a:avLst/>
+          </a:prstGeom>
+          <a:solidFill>
+            <a:schemeClr val="bg1"/>
+          </a:solidFill>
+          <a:ln>
+            <a:solidFill>
+              <a:schemeClr val="tx1"/>
+            </a:solidFill>
+          </a:ln>
+        </p:spPr>
+        <p:style>
+          <a:lnRef idx="2">
+            <a:schemeClr val="accent1">
+              <a:shade val="50000"/>
+            </a:schemeClr>
+          </a:lnRef>
+          <a:fillRef idx="1">
+            <a:schemeClr val="accent1"/>
+          </a:fillRef>
+          <a:effectRef idx="0">
+            <a:schemeClr val="accent1"/>
+          </a:effectRef>
+          <a:fontRef idx="minor">
+            <a:schemeClr val="lt1"/>
+          </a:fontRef>
+        </p:style>
+        <p:txBody>
+          <a:bodyPr rtlCol="0" anchor="ctr"/>
+          <a:lstStyle/>
+          <a:p>
+            <a:pPr algn="ctr"/>
+            <a:endParaRPr kumimoji="1" lang="ja-JP" altLang="en-US"/>
+          </a:p>
+        </p:txBody>
+      </p:sp>
+      <p:sp>
+        <p:nvSpPr>
+          <p:cNvPr id="3" name="正方形/長方形 2">
+            <a:extLst>
+              <a:ext uri="{FF2B5EF4-FFF2-40B4-BE49-F238E27FC236}">
+                <a16:creationId xmlns:a16="http://schemas.microsoft.com/office/drawing/2014/main" id="{2223BF27-DE1B-60C5-32C4-0F71EEF32734}"/>
+              </a:ext>
+            </a:extLst>
+          </p:cNvPr>
+          <p:cNvSpPr/>
+          <p:nvPr/>
+        </p:nvSpPr>
+        <p:spPr>
+          <a:xfrm>
+            <a:off x="6645353" y="1122960"/>
+            <a:ext cx="1069260" cy="1069260"/>
+          </a:xfrm>
+          <a:prstGeom prst="rect">
+            <a:avLst/>
+          </a:prstGeom>
+          <a:solidFill>
+            <a:schemeClr val="bg1"/>
+          </a:solidFill>
+          <a:ln>
+            <a:solidFill>
+              <a:schemeClr val="tx1"/>
+            </a:solidFill>
+          </a:ln>
+        </p:spPr>
+        <p:style>
+          <a:lnRef idx="2">
+            <a:schemeClr val="accent1">
+              <a:shade val="50000"/>
+            </a:schemeClr>
+          </a:lnRef>
+          <a:fillRef idx="1">
+            <a:schemeClr val="accent1"/>
+          </a:fillRef>
+          <a:effectRef idx="0">
+            <a:schemeClr val="accent1"/>
+          </a:effectRef>
+          <a:fontRef idx="minor">
+            <a:schemeClr val="lt1"/>
+          </a:fontRef>
+        </p:style>
+        <p:txBody>
+          <a:bodyPr rtlCol="0" anchor="ctr"/>
+          <a:lstStyle/>
+          <a:p>
+            <a:pPr algn="ctr"/>
+            <a:endParaRPr kumimoji="1" lang="ja-JP" altLang="en-US"/>
+          </a:p>
+        </p:txBody>
+      </p:sp>
+      <p:sp>
+        <p:nvSpPr>
+          <p:cNvPr id="4" name="正方形/長方形 3">
+            <a:extLst>
+              <a:ext uri="{FF2B5EF4-FFF2-40B4-BE49-F238E27FC236}">
+                <a16:creationId xmlns:a16="http://schemas.microsoft.com/office/drawing/2014/main" id="{FB7A2CF3-DAF6-F4C2-8314-8DB3611B918E}"/>
+              </a:ext>
+            </a:extLst>
+          </p:cNvPr>
+          <p:cNvSpPr/>
+          <p:nvPr/>
+        </p:nvSpPr>
+        <p:spPr>
+          <a:xfrm>
+            <a:off x="8075194" y="1122960"/>
+            <a:ext cx="1069260" cy="1069260"/>
+          </a:xfrm>
+          <a:prstGeom prst="rect">
+            <a:avLst/>
+          </a:prstGeom>
+          <a:solidFill>
+            <a:schemeClr val="bg1"/>
+          </a:solidFill>
+          <a:ln>
+            <a:solidFill>
+              <a:schemeClr val="tx1"/>
+            </a:solidFill>
+          </a:ln>
+        </p:spPr>
+        <p:style>
+          <a:lnRef idx="2">
+            <a:schemeClr val="accent1">
+              <a:shade val="50000"/>
+            </a:schemeClr>
+          </a:lnRef>
+          <a:fillRef idx="1">
+            <a:schemeClr val="accent1"/>
+          </a:fillRef>
+          <a:effectRef idx="0">
+            <a:schemeClr val="accent1"/>
+          </a:effectRef>
+          <a:fontRef idx="minor">
+            <a:schemeClr val="lt1"/>
+          </a:fontRef>
+        </p:style>
+        <p:txBody>
+          <a:bodyPr rtlCol="0" anchor="ctr"/>
+          <a:lstStyle/>
+          <a:p>
+            <a:pPr algn="ctr"/>
+            <a:endParaRPr kumimoji="1" lang="ja-JP" altLang="en-US"/>
+          </a:p>
+        </p:txBody>
+      </p:sp>
+      <p:sp>
+        <p:nvSpPr>
+          <p:cNvPr id="5" name="正方形/長方形 4">
+            <a:extLst>
+              <a:ext uri="{FF2B5EF4-FFF2-40B4-BE49-F238E27FC236}">
+                <a16:creationId xmlns:a16="http://schemas.microsoft.com/office/drawing/2014/main" id="{2DACD76C-7D2D-4410-89DF-5311A98D7F0C}"/>
+              </a:ext>
+            </a:extLst>
+          </p:cNvPr>
+          <p:cNvSpPr/>
+          <p:nvPr/>
+        </p:nvSpPr>
+        <p:spPr>
+          <a:xfrm>
+            <a:off x="9155958" y="1122960"/>
+            <a:ext cx="1069260" cy="1069260"/>
+          </a:xfrm>
+          <a:prstGeom prst="rect">
+            <a:avLst/>
+          </a:prstGeom>
+          <a:solidFill>
+            <a:schemeClr val="bg1"/>
+          </a:solidFill>
+          <a:ln>
+            <a:solidFill>
+              <a:schemeClr val="tx1"/>
+            </a:solidFill>
+          </a:ln>
+        </p:spPr>
+        <p:style>
+          <a:lnRef idx="2">
+            <a:schemeClr val="accent1">
+              <a:shade val="50000"/>
+            </a:schemeClr>
+          </a:lnRef>
+          <a:fillRef idx="1">
+            <a:schemeClr val="accent1"/>
+          </a:fillRef>
+          <a:effectRef idx="0">
+            <a:schemeClr val="accent1"/>
+          </a:effectRef>
+          <a:fontRef idx="minor">
+            <a:schemeClr val="lt1"/>
+          </a:fontRef>
+        </p:style>
+        <p:txBody>
+          <a:bodyPr rtlCol="0" anchor="ctr"/>
+          <a:lstStyle/>
+          <a:p>
+            <a:pPr algn="ctr"/>
+            <a:endParaRPr kumimoji="1" lang="ja-JP" altLang="en-US"/>
+          </a:p>
+        </p:txBody>
+      </p:sp>
+      <p:sp>
+        <p:nvSpPr>
+          <p:cNvPr id="6" name="正方形/長方形 5">
+            <a:extLst>
+              <a:ext uri="{FF2B5EF4-FFF2-40B4-BE49-F238E27FC236}">
+                <a16:creationId xmlns:a16="http://schemas.microsoft.com/office/drawing/2014/main" id="{60FF3B91-7D0C-7798-6DF2-0FEFED0C0193}"/>
+              </a:ext>
+            </a:extLst>
+          </p:cNvPr>
+          <p:cNvSpPr/>
+          <p:nvPr/>
+        </p:nvSpPr>
+        <p:spPr>
+          <a:xfrm>
+            <a:off x="10236721" y="1122960"/>
+            <a:ext cx="1069260" cy="1069260"/>
+          </a:xfrm>
+          <a:prstGeom prst="rect">
+            <a:avLst/>
+          </a:prstGeom>
+          <a:solidFill>
+            <a:schemeClr val="bg1"/>
+          </a:solidFill>
+          <a:ln>
+            <a:solidFill>
+              <a:schemeClr val="tx1"/>
+            </a:solidFill>
+          </a:ln>
+        </p:spPr>
+        <p:style>
+          <a:lnRef idx="2">
+            <a:schemeClr val="accent1">
+              <a:shade val="50000"/>
+            </a:schemeClr>
+          </a:lnRef>
+          <a:fillRef idx="1">
+            <a:schemeClr val="accent1"/>
+          </a:fillRef>
+          <a:effectRef idx="0">
+            <a:schemeClr val="accent1"/>
+          </a:effectRef>
+          <a:fontRef idx="minor">
+            <a:schemeClr val="lt1"/>
+          </a:fontRef>
+        </p:style>
+        <p:txBody>
+          <a:bodyPr rtlCol="0" anchor="ctr"/>
+          <a:lstStyle/>
+          <a:p>
+            <a:pPr algn="ctr"/>
+            <a:endParaRPr kumimoji="1" lang="ja-JP" altLang="en-US"/>
+          </a:p>
+        </p:txBody>
+      </p:sp>
     </p:spTree>
     <p:extLst>
       <p:ext uri="{BB962C8B-B14F-4D97-AF65-F5344CB8AC3E}">
@@ -5093,6 +5342,222 @@
           </a:prstGeom>
         </p:spPr>
       </p:pic>
+      <p:sp>
+        <p:nvSpPr>
+          <p:cNvPr id="2" name="正方形/長方形 1">
+            <a:extLst>
+              <a:ext uri="{FF2B5EF4-FFF2-40B4-BE49-F238E27FC236}">
+                <a16:creationId xmlns:a16="http://schemas.microsoft.com/office/drawing/2014/main" id="{7FC66BE2-F3ED-6BEE-45C0-EF75962DCFD7}"/>
+              </a:ext>
+            </a:extLst>
+          </p:cNvPr>
+          <p:cNvSpPr/>
+          <p:nvPr/>
+        </p:nvSpPr>
+        <p:spPr>
+          <a:xfrm>
+            <a:off x="6645353" y="1122960"/>
+            <a:ext cx="1069260" cy="1069260"/>
+          </a:xfrm>
+          <a:prstGeom prst="rect">
+            <a:avLst/>
+          </a:prstGeom>
+          <a:solidFill>
+            <a:schemeClr val="bg1"/>
+          </a:solidFill>
+          <a:ln>
+            <a:solidFill>
+              <a:schemeClr val="tx1"/>
+            </a:solidFill>
+          </a:ln>
+        </p:spPr>
+        <p:style>
+          <a:lnRef idx="2">
+            <a:schemeClr val="accent1">
+              <a:shade val="50000"/>
+            </a:schemeClr>
+          </a:lnRef>
+          <a:fillRef idx="1">
+            <a:schemeClr val="accent1"/>
+          </a:fillRef>
+          <a:effectRef idx="0">
+            <a:schemeClr val="accent1"/>
+          </a:effectRef>
+          <a:fontRef idx="minor">
+            <a:schemeClr val="lt1"/>
+          </a:fontRef>
+        </p:style>
+        <p:txBody>
+          <a:bodyPr rtlCol="0" anchor="ctr"/>
+          <a:lstStyle/>
+          <a:p>
+            <a:pPr algn="ctr"/>
+            <a:endParaRPr kumimoji="1" lang="ja-JP" altLang="en-US"/>
+          </a:p>
+        </p:txBody>
+      </p:sp>
+      <p:sp>
+        <p:nvSpPr>
+          <p:cNvPr id="3" name="正方形/長方形 2">
+            <a:extLst>
+              <a:ext uri="{FF2B5EF4-FFF2-40B4-BE49-F238E27FC236}">
+                <a16:creationId xmlns:a16="http://schemas.microsoft.com/office/drawing/2014/main" id="{9FFC5C6D-2ECB-93EC-E53B-085C20A8C81D}"/>
+              </a:ext>
+            </a:extLst>
+          </p:cNvPr>
+          <p:cNvSpPr/>
+          <p:nvPr/>
+        </p:nvSpPr>
+        <p:spPr>
+          <a:xfrm>
+            <a:off x="8075194" y="1122960"/>
+            <a:ext cx="1069260" cy="1069260"/>
+          </a:xfrm>
+          <a:prstGeom prst="rect">
+            <a:avLst/>
+          </a:prstGeom>
+          <a:solidFill>
+            <a:schemeClr val="bg1"/>
+          </a:solidFill>
+          <a:ln>
+            <a:solidFill>
+              <a:schemeClr val="tx1"/>
+            </a:solidFill>
+          </a:ln>
+        </p:spPr>
+        <p:style>
+          <a:lnRef idx="2">
+            <a:schemeClr val="accent1">
+              <a:shade val="50000"/>
+            </a:schemeClr>
+          </a:lnRef>
+          <a:fillRef idx="1">
+            <a:schemeClr val="accent1"/>
+          </a:fillRef>
+          <a:effectRef idx="0">
+            <a:schemeClr val="accent1"/>
+          </a:effectRef>
+          <a:fontRef idx="minor">
+            <a:schemeClr val="lt1"/>
+          </a:fontRef>
+        </p:style>
+        <p:txBody>
+          <a:bodyPr rtlCol="0" anchor="ctr"/>
+          <a:lstStyle/>
+          <a:p>
+            <a:pPr algn="ctr"/>
+            <a:endParaRPr kumimoji="1" lang="ja-JP" altLang="en-US"/>
+          </a:p>
+        </p:txBody>
+      </p:sp>
+      <p:sp>
+        <p:nvSpPr>
+          <p:cNvPr id="4" name="正方形/長方形 3">
+            <a:extLst>
+              <a:ext uri="{FF2B5EF4-FFF2-40B4-BE49-F238E27FC236}">
+                <a16:creationId xmlns:a16="http://schemas.microsoft.com/office/drawing/2014/main" id="{B42333A3-78BC-8898-A63C-3D8AF8D2864C}"/>
+              </a:ext>
+            </a:extLst>
+          </p:cNvPr>
+          <p:cNvSpPr/>
+          <p:nvPr/>
+        </p:nvSpPr>
+        <p:spPr>
+          <a:xfrm>
+            <a:off x="9155958" y="1122960"/>
+            <a:ext cx="1069260" cy="1069260"/>
+          </a:xfrm>
+          <a:prstGeom prst="rect">
+            <a:avLst/>
+          </a:prstGeom>
+          <a:solidFill>
+            <a:schemeClr val="bg1"/>
+          </a:solidFill>
+          <a:ln>
+            <a:solidFill>
+              <a:schemeClr val="tx1"/>
+            </a:solidFill>
+          </a:ln>
+        </p:spPr>
+        <p:style>
+          <a:lnRef idx="2">
+            <a:schemeClr val="accent1">
+              <a:shade val="50000"/>
+            </a:schemeClr>
+          </a:lnRef>
+          <a:fillRef idx="1">
+            <a:schemeClr val="accent1"/>
+          </a:fillRef>
+          <a:effectRef idx="0">
+            <a:schemeClr val="accent1"/>
+          </a:effectRef>
+          <a:fontRef idx="minor">
+            <a:schemeClr val="lt1"/>
+          </a:fontRef>
+        </p:style>
+        <p:txBody>
+          <a:bodyPr rtlCol="0" anchor="ctr"/>
+          <a:lstStyle/>
+          <a:p>
+            <a:pPr algn="ctr"/>
+            <a:endParaRPr kumimoji="1" lang="ja-JP" altLang="en-US"/>
+          </a:p>
+        </p:txBody>
+      </p:sp>
+      <p:sp>
+        <p:nvSpPr>
+          <p:cNvPr id="5" name="正方形/長方形 4">
+            <a:extLst>
+              <a:ext uri="{FF2B5EF4-FFF2-40B4-BE49-F238E27FC236}">
+                <a16:creationId xmlns:a16="http://schemas.microsoft.com/office/drawing/2014/main" id="{BADBFB34-5BEB-8112-5148-5305C25A9CEE}"/>
+              </a:ext>
+            </a:extLst>
+          </p:cNvPr>
+          <p:cNvSpPr/>
+          <p:nvPr/>
+        </p:nvSpPr>
+        <p:spPr>
+          <a:xfrm>
+            <a:off x="10236721" y="1122960"/>
+            <a:ext cx="1069260" cy="1069260"/>
+          </a:xfrm>
+          <a:prstGeom prst="rect">
+            <a:avLst/>
+          </a:prstGeom>
+          <a:solidFill>
+            <a:schemeClr val="bg1"/>
+          </a:solidFill>
+          <a:ln>
+            <a:solidFill>
+              <a:schemeClr val="tx1"/>
+            </a:solidFill>
+          </a:ln>
+        </p:spPr>
+        <p:style>
+          <a:lnRef idx="2">
+            <a:schemeClr val="accent1">
+              <a:shade val="50000"/>
+            </a:schemeClr>
+          </a:lnRef>
+          <a:fillRef idx="1">
+            <a:schemeClr val="accent1"/>
+          </a:fillRef>
+          <a:effectRef idx="0">
+            <a:schemeClr val="accent1"/>
+          </a:effectRef>
+          <a:fontRef idx="minor">
+            <a:schemeClr val="lt1"/>
+          </a:fontRef>
+        </p:style>
+        <p:txBody>
+          <a:bodyPr rtlCol="0" anchor="ctr"/>
+          <a:lstStyle/>
+          <a:p>
+            <a:pPr algn="ctr"/>
+            <a:endParaRPr kumimoji="1" lang="ja-JP" altLang="en-US"/>
+          </a:p>
+        </p:txBody>
+      </p:sp>
     </p:spTree>
     <p:extLst>
       <p:ext uri="{BB962C8B-B14F-4D97-AF65-F5344CB8AC3E}">
@@ -5909,6 +6374,252 @@
           <a:xfrm>
             <a:off x="5228355" y="1213821"/>
             <a:ext cx="1008872" cy="856415"/>
+          </a:xfrm>
+          <a:prstGeom prst="rect">
+            <a:avLst/>
+          </a:prstGeom>
+        </p:spPr>
+      </p:pic>
+      <p:sp>
+        <p:nvSpPr>
+          <p:cNvPr id="2" name="正方形/長方形 1">
+            <a:extLst>
+              <a:ext uri="{FF2B5EF4-FFF2-40B4-BE49-F238E27FC236}">
+                <a16:creationId xmlns:a16="http://schemas.microsoft.com/office/drawing/2014/main" id="{A15A890E-915F-502D-AF70-D8298557AE0C}"/>
+              </a:ext>
+            </a:extLst>
+          </p:cNvPr>
+          <p:cNvSpPr/>
+          <p:nvPr/>
+        </p:nvSpPr>
+        <p:spPr>
+          <a:xfrm>
+            <a:off x="6645353" y="1122960"/>
+            <a:ext cx="1069260" cy="1069260"/>
+          </a:xfrm>
+          <a:prstGeom prst="rect">
+            <a:avLst/>
+          </a:prstGeom>
+          <a:solidFill>
+            <a:schemeClr val="bg1"/>
+          </a:solidFill>
+          <a:ln>
+            <a:solidFill>
+              <a:schemeClr val="tx1"/>
+            </a:solidFill>
+          </a:ln>
+        </p:spPr>
+        <p:style>
+          <a:lnRef idx="2">
+            <a:schemeClr val="accent1">
+              <a:shade val="50000"/>
+            </a:schemeClr>
+          </a:lnRef>
+          <a:fillRef idx="1">
+            <a:schemeClr val="accent1"/>
+          </a:fillRef>
+          <a:effectRef idx="0">
+            <a:schemeClr val="accent1"/>
+          </a:effectRef>
+          <a:fontRef idx="minor">
+            <a:schemeClr val="lt1"/>
+          </a:fontRef>
+        </p:style>
+        <p:txBody>
+          <a:bodyPr rtlCol="0" anchor="ctr"/>
+          <a:lstStyle/>
+          <a:p>
+            <a:pPr algn="ctr"/>
+            <a:endParaRPr kumimoji="1" lang="ja-JP" altLang="en-US"/>
+          </a:p>
+        </p:txBody>
+      </p:sp>
+      <p:sp>
+        <p:nvSpPr>
+          <p:cNvPr id="3" name="正方形/長方形 2">
+            <a:extLst>
+              <a:ext uri="{FF2B5EF4-FFF2-40B4-BE49-F238E27FC236}">
+                <a16:creationId xmlns:a16="http://schemas.microsoft.com/office/drawing/2014/main" id="{A7FB960C-D8AA-D76E-3776-50D208FB0F93}"/>
+              </a:ext>
+            </a:extLst>
+          </p:cNvPr>
+          <p:cNvSpPr/>
+          <p:nvPr/>
+        </p:nvSpPr>
+        <p:spPr>
+          <a:xfrm>
+            <a:off x="8075194" y="1122960"/>
+            <a:ext cx="1069260" cy="1069260"/>
+          </a:xfrm>
+          <a:prstGeom prst="rect">
+            <a:avLst/>
+          </a:prstGeom>
+          <a:solidFill>
+            <a:schemeClr val="bg1"/>
+          </a:solidFill>
+          <a:ln>
+            <a:solidFill>
+              <a:schemeClr val="tx1"/>
+            </a:solidFill>
+          </a:ln>
+        </p:spPr>
+        <p:style>
+          <a:lnRef idx="2">
+            <a:schemeClr val="accent1">
+              <a:shade val="50000"/>
+            </a:schemeClr>
+          </a:lnRef>
+          <a:fillRef idx="1">
+            <a:schemeClr val="accent1"/>
+          </a:fillRef>
+          <a:effectRef idx="0">
+            <a:schemeClr val="accent1"/>
+          </a:effectRef>
+          <a:fontRef idx="minor">
+            <a:schemeClr val="lt1"/>
+          </a:fontRef>
+        </p:style>
+        <p:txBody>
+          <a:bodyPr rtlCol="0" anchor="ctr"/>
+          <a:lstStyle/>
+          <a:p>
+            <a:pPr algn="ctr"/>
+            <a:endParaRPr kumimoji="1" lang="ja-JP" altLang="en-US"/>
+          </a:p>
+        </p:txBody>
+      </p:sp>
+      <p:sp>
+        <p:nvSpPr>
+          <p:cNvPr id="4" name="正方形/長方形 3">
+            <a:extLst>
+              <a:ext uri="{FF2B5EF4-FFF2-40B4-BE49-F238E27FC236}">
+                <a16:creationId xmlns:a16="http://schemas.microsoft.com/office/drawing/2014/main" id="{9FD04BEE-8FA4-815F-418A-B3A433E47F89}"/>
+              </a:ext>
+            </a:extLst>
+          </p:cNvPr>
+          <p:cNvSpPr/>
+          <p:nvPr/>
+        </p:nvSpPr>
+        <p:spPr>
+          <a:xfrm>
+            <a:off x="9155958" y="1122960"/>
+            <a:ext cx="1069260" cy="1069260"/>
+          </a:xfrm>
+          <a:prstGeom prst="rect">
+            <a:avLst/>
+          </a:prstGeom>
+          <a:solidFill>
+            <a:schemeClr val="bg1"/>
+          </a:solidFill>
+          <a:ln>
+            <a:solidFill>
+              <a:schemeClr val="tx1"/>
+            </a:solidFill>
+          </a:ln>
+        </p:spPr>
+        <p:style>
+          <a:lnRef idx="2">
+            <a:schemeClr val="accent1">
+              <a:shade val="50000"/>
+            </a:schemeClr>
+          </a:lnRef>
+          <a:fillRef idx="1">
+            <a:schemeClr val="accent1"/>
+          </a:fillRef>
+          <a:effectRef idx="0">
+            <a:schemeClr val="accent1"/>
+          </a:effectRef>
+          <a:fontRef idx="minor">
+            <a:schemeClr val="lt1"/>
+          </a:fontRef>
+        </p:style>
+        <p:txBody>
+          <a:bodyPr rtlCol="0" anchor="ctr"/>
+          <a:lstStyle/>
+          <a:p>
+            <a:pPr algn="ctr"/>
+            <a:endParaRPr kumimoji="1" lang="ja-JP" altLang="en-US"/>
+          </a:p>
+        </p:txBody>
+      </p:sp>
+      <p:sp>
+        <p:nvSpPr>
+          <p:cNvPr id="5" name="正方形/長方形 4">
+            <a:extLst>
+              <a:ext uri="{FF2B5EF4-FFF2-40B4-BE49-F238E27FC236}">
+                <a16:creationId xmlns:a16="http://schemas.microsoft.com/office/drawing/2014/main" id="{7B63CD25-2E07-B091-D7C4-1A4B8DD5E316}"/>
+              </a:ext>
+            </a:extLst>
+          </p:cNvPr>
+          <p:cNvSpPr/>
+          <p:nvPr/>
+        </p:nvSpPr>
+        <p:spPr>
+          <a:xfrm>
+            <a:off x="10236721" y="1122960"/>
+            <a:ext cx="1069260" cy="1069260"/>
+          </a:xfrm>
+          <a:prstGeom prst="rect">
+            <a:avLst/>
+          </a:prstGeom>
+          <a:solidFill>
+            <a:schemeClr val="bg1"/>
+          </a:solidFill>
+          <a:ln>
+            <a:solidFill>
+              <a:schemeClr val="tx1"/>
+            </a:solidFill>
+          </a:ln>
+        </p:spPr>
+        <p:style>
+          <a:lnRef idx="2">
+            <a:schemeClr val="accent1">
+              <a:shade val="50000"/>
+            </a:schemeClr>
+          </a:lnRef>
+          <a:fillRef idx="1">
+            <a:schemeClr val="accent1"/>
+          </a:fillRef>
+          <a:effectRef idx="0">
+            <a:schemeClr val="accent1"/>
+          </a:effectRef>
+          <a:fontRef idx="minor">
+            <a:schemeClr val="lt1"/>
+          </a:fontRef>
+        </p:style>
+        <p:txBody>
+          <a:bodyPr rtlCol="0" anchor="ctr"/>
+          <a:lstStyle/>
+          <a:p>
+            <a:pPr algn="ctr"/>
+            <a:endParaRPr kumimoji="1" lang="ja-JP" altLang="en-US"/>
+          </a:p>
+        </p:txBody>
+      </p:sp>
+      <p:pic>
+        <p:nvPicPr>
+          <p:cNvPr id="6" name="図 5">
+            <a:extLst>
+              <a:ext uri="{FF2B5EF4-FFF2-40B4-BE49-F238E27FC236}">
+                <a16:creationId xmlns:a16="http://schemas.microsoft.com/office/drawing/2014/main" id="{53620098-7FF1-2C97-ADE2-5EE0718ED954}"/>
+              </a:ext>
+            </a:extLst>
+          </p:cNvPr>
+          <p:cNvPicPr>
+            <a:picLocks noChangeAspect="1"/>
+          </p:cNvPicPr>
+          <p:nvPr/>
+        </p:nvPicPr>
+        <p:blipFill>
+          <a:blip r:embed="rId8"/>
+          <a:stretch>
+            <a:fillRect/>
+          </a:stretch>
+        </p:blipFill>
+        <p:spPr>
+          <a:xfrm>
+            <a:off x="6675547" y="1611032"/>
+            <a:ext cx="1008872" cy="90041"/>
           </a:xfrm>
           <a:prstGeom prst="rect">
             <a:avLst/>

--- a/soldier weapon.pptx
+++ b/soldier weapon.pptx
@@ -247,7 +247,7 @@
           <a:p>
             <a:fld id="{0E085FA6-3BB9-47BA-8D81-299A75D1B58A}" type="datetimeFigureOut">
               <a:rPr kumimoji="1" lang="ja-JP" altLang="en-US" smtClean="0"/>
-              <a:t>2025/7/29</a:t>
+              <a:t>2025/8/4</a:t>
             </a:fld>
             <a:endParaRPr kumimoji="1" lang="ja-JP" altLang="en-US"/>
           </a:p>
@@ -447,7 +447,7 @@
           <a:p>
             <a:fld id="{0E085FA6-3BB9-47BA-8D81-299A75D1B58A}" type="datetimeFigureOut">
               <a:rPr kumimoji="1" lang="ja-JP" altLang="en-US" smtClean="0"/>
-              <a:t>2025/7/29</a:t>
+              <a:t>2025/8/4</a:t>
             </a:fld>
             <a:endParaRPr kumimoji="1" lang="ja-JP" altLang="en-US"/>
           </a:p>
@@ -657,7 +657,7 @@
           <a:p>
             <a:fld id="{0E085FA6-3BB9-47BA-8D81-299A75D1B58A}" type="datetimeFigureOut">
               <a:rPr kumimoji="1" lang="ja-JP" altLang="en-US" smtClean="0"/>
-              <a:t>2025/7/29</a:t>
+              <a:t>2025/8/4</a:t>
             </a:fld>
             <a:endParaRPr kumimoji="1" lang="ja-JP" altLang="en-US"/>
           </a:p>
@@ -857,7 +857,7 @@
           <a:p>
             <a:fld id="{0E085FA6-3BB9-47BA-8D81-299A75D1B58A}" type="datetimeFigureOut">
               <a:rPr kumimoji="1" lang="ja-JP" altLang="en-US" smtClean="0"/>
-              <a:t>2025/7/29</a:t>
+              <a:t>2025/8/4</a:t>
             </a:fld>
             <a:endParaRPr kumimoji="1" lang="ja-JP" altLang="en-US"/>
           </a:p>
@@ -1102,7 +1102,7 @@
           <a:p>
             <a:fld id="{0E085FA6-3BB9-47BA-8D81-299A75D1B58A}" type="datetimeFigureOut">
               <a:rPr kumimoji="1" lang="ja-JP" altLang="en-US" smtClean="0"/>
-              <a:t>2025/7/29</a:t>
+              <a:t>2025/8/4</a:t>
             </a:fld>
             <a:endParaRPr kumimoji="1" lang="ja-JP" altLang="en-US"/>
           </a:p>
@@ -1395,7 +1395,7 @@
           <a:p>
             <a:fld id="{0E085FA6-3BB9-47BA-8D81-299A75D1B58A}" type="datetimeFigureOut">
               <a:rPr kumimoji="1" lang="ja-JP" altLang="en-US" smtClean="0"/>
-              <a:t>2025/7/29</a:t>
+              <a:t>2025/8/4</a:t>
             </a:fld>
             <a:endParaRPr kumimoji="1" lang="ja-JP" altLang="en-US"/>
           </a:p>
@@ -1823,7 +1823,7 @@
           <a:p>
             <a:fld id="{0E085FA6-3BB9-47BA-8D81-299A75D1B58A}" type="datetimeFigureOut">
               <a:rPr kumimoji="1" lang="ja-JP" altLang="en-US" smtClean="0"/>
-              <a:t>2025/7/29</a:t>
+              <a:t>2025/8/4</a:t>
             </a:fld>
             <a:endParaRPr kumimoji="1" lang="ja-JP" altLang="en-US"/>
           </a:p>
@@ -1940,7 +1940,7 @@
           <a:p>
             <a:fld id="{0E085FA6-3BB9-47BA-8D81-299A75D1B58A}" type="datetimeFigureOut">
               <a:rPr kumimoji="1" lang="ja-JP" altLang="en-US" smtClean="0"/>
-              <a:t>2025/7/29</a:t>
+              <a:t>2025/8/4</a:t>
             </a:fld>
             <a:endParaRPr kumimoji="1" lang="ja-JP" altLang="en-US"/>
           </a:p>
@@ -2035,7 +2035,7 @@
           <a:p>
             <a:fld id="{0E085FA6-3BB9-47BA-8D81-299A75D1B58A}" type="datetimeFigureOut">
               <a:rPr kumimoji="1" lang="ja-JP" altLang="en-US" smtClean="0"/>
-              <a:t>2025/7/29</a:t>
+              <a:t>2025/8/4</a:t>
             </a:fld>
             <a:endParaRPr kumimoji="1" lang="ja-JP" altLang="en-US"/>
           </a:p>
@@ -2342,7 +2342,7 @@
           <a:p>
             <a:fld id="{0E085FA6-3BB9-47BA-8D81-299A75D1B58A}" type="datetimeFigureOut">
               <a:rPr kumimoji="1" lang="ja-JP" altLang="en-US" smtClean="0"/>
-              <a:t>2025/7/29</a:t>
+              <a:t>2025/8/4</a:t>
             </a:fld>
             <a:endParaRPr kumimoji="1" lang="ja-JP" altLang="en-US"/>
           </a:p>
@@ -2594,7 +2594,7 @@
           <a:p>
             <a:fld id="{0E085FA6-3BB9-47BA-8D81-299A75D1B58A}" type="datetimeFigureOut">
               <a:rPr kumimoji="1" lang="ja-JP" altLang="en-US" smtClean="0"/>
-              <a:t>2025/7/29</a:t>
+              <a:t>2025/8/4</a:t>
             </a:fld>
             <a:endParaRPr kumimoji="1" lang="ja-JP" altLang="en-US"/>
           </a:p>
@@ -2837,7 +2837,7 @@
           <a:p>
             <a:fld id="{0E085FA6-3BB9-47BA-8D81-299A75D1B58A}" type="datetimeFigureOut">
               <a:rPr kumimoji="1" lang="ja-JP" altLang="en-US" smtClean="0"/>
-              <a:t>2025/7/29</a:t>
+              <a:t>2025/8/4</a:t>
             </a:fld>
             <a:endParaRPr kumimoji="1" lang="ja-JP" altLang="en-US"/>
           </a:p>
@@ -5558,6 +5558,284 @@
           </a:p>
         </p:txBody>
       </p:sp>
+      <p:sp>
+        <p:nvSpPr>
+          <p:cNvPr id="7" name="ひし形 6">
+            <a:extLst>
+              <a:ext uri="{FF2B5EF4-FFF2-40B4-BE49-F238E27FC236}">
+                <a16:creationId xmlns:a16="http://schemas.microsoft.com/office/drawing/2014/main" id="{773ACCE4-ADF2-F1A1-C0F0-24801FE42745}"/>
+              </a:ext>
+            </a:extLst>
+          </p:cNvPr>
+          <p:cNvSpPr/>
+          <p:nvPr/>
+        </p:nvSpPr>
+        <p:spPr>
+          <a:xfrm rot="2444609">
+            <a:off x="9680055" y="1071360"/>
+            <a:ext cx="60114" cy="1206102"/>
+          </a:xfrm>
+          <a:prstGeom prst="diamond">
+            <a:avLst/>
+          </a:prstGeom>
+          <a:solidFill>
+            <a:schemeClr val="accent3">
+              <a:lumMod val="75000"/>
+            </a:schemeClr>
+          </a:solidFill>
+          <a:ln>
+            <a:noFill/>
+          </a:ln>
+        </p:spPr>
+        <p:style>
+          <a:lnRef idx="2">
+            <a:schemeClr val="accent1">
+              <a:shade val="15000"/>
+            </a:schemeClr>
+          </a:lnRef>
+          <a:fillRef idx="1">
+            <a:schemeClr val="accent1"/>
+          </a:fillRef>
+          <a:effectRef idx="0">
+            <a:schemeClr val="accent1"/>
+          </a:effectRef>
+          <a:fontRef idx="minor">
+            <a:schemeClr val="lt1"/>
+          </a:fontRef>
+        </p:style>
+        <p:txBody>
+          <a:bodyPr rtlCol="0" anchor="ctr"/>
+          <a:lstStyle/>
+          <a:p>
+            <a:pPr algn="ctr"/>
+            <a:endParaRPr kumimoji="1" lang="ja-JP" altLang="en-US"/>
+          </a:p>
+        </p:txBody>
+      </p:sp>
+      <p:sp>
+        <p:nvSpPr>
+          <p:cNvPr id="8" name="ひし形 7">
+            <a:extLst>
+              <a:ext uri="{FF2B5EF4-FFF2-40B4-BE49-F238E27FC236}">
+                <a16:creationId xmlns:a16="http://schemas.microsoft.com/office/drawing/2014/main" id="{3F78A5D0-383F-0C9A-866D-F2336DDD8C17}"/>
+              </a:ext>
+            </a:extLst>
+          </p:cNvPr>
+          <p:cNvSpPr/>
+          <p:nvPr/>
+        </p:nvSpPr>
+        <p:spPr>
+          <a:xfrm rot="18754280">
+            <a:off x="9681962" y="1483362"/>
+            <a:ext cx="45998" cy="390534"/>
+          </a:xfrm>
+          <a:prstGeom prst="diamond">
+            <a:avLst/>
+          </a:prstGeom>
+          <a:solidFill>
+            <a:schemeClr val="accent3">
+              <a:lumMod val="75000"/>
+            </a:schemeClr>
+          </a:solidFill>
+          <a:ln>
+            <a:noFill/>
+          </a:ln>
+        </p:spPr>
+        <p:style>
+          <a:lnRef idx="2">
+            <a:schemeClr val="accent1">
+              <a:shade val="15000"/>
+            </a:schemeClr>
+          </a:lnRef>
+          <a:fillRef idx="1">
+            <a:schemeClr val="accent1"/>
+          </a:fillRef>
+          <a:effectRef idx="0">
+            <a:schemeClr val="accent1"/>
+          </a:effectRef>
+          <a:fontRef idx="minor">
+            <a:schemeClr val="lt1"/>
+          </a:fontRef>
+        </p:style>
+        <p:txBody>
+          <a:bodyPr rtlCol="0" anchor="ctr"/>
+          <a:lstStyle/>
+          <a:p>
+            <a:pPr algn="ctr"/>
+            <a:endParaRPr kumimoji="1" lang="ja-JP" altLang="en-US"/>
+          </a:p>
+        </p:txBody>
+      </p:sp>
+      <p:pic>
+        <p:nvPicPr>
+          <p:cNvPr id="13" name="図 12">
+            <a:extLst>
+              <a:ext uri="{FF2B5EF4-FFF2-40B4-BE49-F238E27FC236}">
+                <a16:creationId xmlns:a16="http://schemas.microsoft.com/office/drawing/2014/main" id="{DD0F5FF6-411F-1BE5-B422-8AE76A3D0C6A}"/>
+              </a:ext>
+            </a:extLst>
+          </p:cNvPr>
+          <p:cNvPicPr>
+            <a:picLocks noChangeAspect="1"/>
+          </p:cNvPicPr>
+          <p:nvPr/>
+        </p:nvPicPr>
+        <p:blipFill>
+          <a:blip r:embed="rId3"/>
+          <a:srcRect l="39984" t="-1" b="40437"/>
+          <a:stretch>
+            <a:fillRect/>
+          </a:stretch>
+        </p:blipFill>
+        <p:spPr>
+          <a:xfrm>
+            <a:off x="8547735" y="1197897"/>
+            <a:ext cx="475663" cy="548323"/>
+          </a:xfrm>
+          <a:prstGeom prst="rect">
+            <a:avLst/>
+          </a:prstGeom>
+        </p:spPr>
+      </p:pic>
+      <p:pic>
+        <p:nvPicPr>
+          <p:cNvPr id="14" name="図 13">
+            <a:extLst>
+              <a:ext uri="{FF2B5EF4-FFF2-40B4-BE49-F238E27FC236}">
+                <a16:creationId xmlns:a16="http://schemas.microsoft.com/office/drawing/2014/main" id="{C272DF64-BC3C-2E48-E93B-C394BBFDB3CE}"/>
+              </a:ext>
+            </a:extLst>
+          </p:cNvPr>
+          <p:cNvPicPr>
+            <a:picLocks noChangeAspect="1"/>
+          </p:cNvPicPr>
+          <p:nvPr/>
+        </p:nvPicPr>
+        <p:blipFill>
+          <a:blip r:embed="rId3"/>
+          <a:srcRect t="45869" r="44493" b="1"/>
+          <a:stretch>
+            <a:fillRect/>
+          </a:stretch>
+        </p:blipFill>
+        <p:spPr>
+          <a:xfrm>
+            <a:off x="10340473" y="1615440"/>
+            <a:ext cx="439922" cy="498316"/>
+          </a:xfrm>
+          <a:prstGeom prst="rect">
+            <a:avLst/>
+          </a:prstGeom>
+        </p:spPr>
+      </p:pic>
+      <p:sp>
+        <p:nvSpPr>
+          <p:cNvPr id="15" name="ひし形 14">
+            <a:extLst>
+              <a:ext uri="{FF2B5EF4-FFF2-40B4-BE49-F238E27FC236}">
+                <a16:creationId xmlns:a16="http://schemas.microsoft.com/office/drawing/2014/main" id="{D297ECFE-E369-C068-DD2A-5DB73C77F6A9}"/>
+              </a:ext>
+            </a:extLst>
+          </p:cNvPr>
+          <p:cNvSpPr/>
+          <p:nvPr/>
+        </p:nvSpPr>
+        <p:spPr>
+          <a:xfrm rot="18754280">
+            <a:off x="8593672" y="1577471"/>
+            <a:ext cx="45719" cy="232254"/>
+          </a:xfrm>
+          <a:prstGeom prst="diamond">
+            <a:avLst/>
+          </a:prstGeom>
+          <a:solidFill>
+            <a:schemeClr val="accent3">
+              <a:lumMod val="75000"/>
+            </a:schemeClr>
+          </a:solidFill>
+          <a:ln>
+            <a:noFill/>
+          </a:ln>
+        </p:spPr>
+        <p:style>
+          <a:lnRef idx="2">
+            <a:schemeClr val="accent1">
+              <a:shade val="15000"/>
+            </a:schemeClr>
+          </a:lnRef>
+          <a:fillRef idx="1">
+            <a:schemeClr val="accent1"/>
+          </a:fillRef>
+          <a:effectRef idx="0">
+            <a:schemeClr val="accent1"/>
+          </a:effectRef>
+          <a:fontRef idx="minor">
+            <a:schemeClr val="lt1"/>
+          </a:fontRef>
+        </p:style>
+        <p:txBody>
+          <a:bodyPr rtlCol="0" anchor="ctr"/>
+          <a:lstStyle/>
+          <a:p>
+            <a:pPr algn="ctr"/>
+            <a:endParaRPr kumimoji="1" lang="ja-JP" altLang="en-US"/>
+          </a:p>
+        </p:txBody>
+      </p:sp>
+      <p:sp>
+        <p:nvSpPr>
+          <p:cNvPr id="17" name="ひし形 16">
+            <a:extLst>
+              <a:ext uri="{FF2B5EF4-FFF2-40B4-BE49-F238E27FC236}">
+                <a16:creationId xmlns:a16="http://schemas.microsoft.com/office/drawing/2014/main" id="{D9E793F9-08BC-A582-C054-CFD7785C915E}"/>
+              </a:ext>
+            </a:extLst>
+          </p:cNvPr>
+          <p:cNvSpPr/>
+          <p:nvPr/>
+        </p:nvSpPr>
+        <p:spPr>
+          <a:xfrm rot="18754280">
+            <a:off x="10657894" y="1577471"/>
+            <a:ext cx="45719" cy="232254"/>
+          </a:xfrm>
+          <a:prstGeom prst="diamond">
+            <a:avLst/>
+          </a:prstGeom>
+          <a:solidFill>
+            <a:schemeClr val="accent3">
+              <a:lumMod val="75000"/>
+            </a:schemeClr>
+          </a:solidFill>
+          <a:ln>
+            <a:noFill/>
+          </a:ln>
+        </p:spPr>
+        <p:style>
+          <a:lnRef idx="2">
+            <a:schemeClr val="accent1">
+              <a:shade val="15000"/>
+            </a:schemeClr>
+          </a:lnRef>
+          <a:fillRef idx="1">
+            <a:schemeClr val="accent1"/>
+          </a:fillRef>
+          <a:effectRef idx="0">
+            <a:schemeClr val="accent1"/>
+          </a:effectRef>
+          <a:fontRef idx="minor">
+            <a:schemeClr val="lt1"/>
+          </a:fontRef>
+        </p:style>
+        <p:txBody>
+          <a:bodyPr rtlCol="0" anchor="ctr"/>
+          <a:lstStyle/>
+          <a:p>
+            <a:pPr algn="ctr"/>
+            <a:endParaRPr kumimoji="1" lang="ja-JP" altLang="en-US"/>
+          </a:p>
+        </p:txBody>
+      </p:sp>
     </p:spTree>
     <p:extLst>
       <p:ext uri="{BB962C8B-B14F-4D97-AF65-F5344CB8AC3E}">
@@ -6401,7 +6679,7 @@
             <a:avLst/>
           </a:prstGeom>
           <a:solidFill>
-            <a:schemeClr val="bg1"/>
+            <a:srgbClr val="FFFFFF"/>
           </a:solidFill>
           <a:ln>
             <a:solidFill>
@@ -6626,6 +6904,324 @@
           </a:prstGeom>
         </p:spPr>
       </p:pic>
+      <p:sp>
+        <p:nvSpPr>
+          <p:cNvPr id="7" name="星: 4 pt 6">
+            <a:extLst>
+              <a:ext uri="{FF2B5EF4-FFF2-40B4-BE49-F238E27FC236}">
+                <a16:creationId xmlns:a16="http://schemas.microsoft.com/office/drawing/2014/main" id="{667E0BC1-14B4-306B-DFCE-AE5934004DFB}"/>
+              </a:ext>
+            </a:extLst>
+          </p:cNvPr>
+          <p:cNvSpPr/>
+          <p:nvPr/>
+        </p:nvSpPr>
+        <p:spPr>
+          <a:xfrm>
+            <a:off x="8523424" y="1570441"/>
+            <a:ext cx="172800" cy="174299"/>
+          </a:xfrm>
+          <a:prstGeom prst="star4">
+            <a:avLst/>
+          </a:prstGeom>
+          <a:solidFill>
+            <a:srgbClr val="FF0000"/>
+          </a:solidFill>
+          <a:ln>
+            <a:noFill/>
+          </a:ln>
+        </p:spPr>
+        <p:style>
+          <a:lnRef idx="2">
+            <a:schemeClr val="accent1">
+              <a:shade val="15000"/>
+            </a:schemeClr>
+          </a:lnRef>
+          <a:fillRef idx="1">
+            <a:schemeClr val="accent1"/>
+          </a:fillRef>
+          <a:effectRef idx="0">
+            <a:schemeClr val="accent1"/>
+          </a:effectRef>
+          <a:fontRef idx="minor">
+            <a:schemeClr val="lt1"/>
+          </a:fontRef>
+        </p:style>
+        <p:txBody>
+          <a:bodyPr rtlCol="0" anchor="ctr"/>
+          <a:lstStyle/>
+          <a:p>
+            <a:pPr algn="ctr"/>
+            <a:endParaRPr kumimoji="1" lang="ja-JP" altLang="en-US"/>
+          </a:p>
+        </p:txBody>
+      </p:sp>
+      <p:sp>
+        <p:nvSpPr>
+          <p:cNvPr id="8" name="二等辺三角形 7">
+            <a:extLst>
+              <a:ext uri="{FF2B5EF4-FFF2-40B4-BE49-F238E27FC236}">
+                <a16:creationId xmlns:a16="http://schemas.microsoft.com/office/drawing/2014/main" id="{52047109-A6EC-14E0-2252-E2B32E47DC93}"/>
+              </a:ext>
+            </a:extLst>
+          </p:cNvPr>
+          <p:cNvSpPr/>
+          <p:nvPr/>
+        </p:nvSpPr>
+        <p:spPr>
+          <a:xfrm rot="13073411">
+            <a:off x="8623332" y="1556635"/>
+            <a:ext cx="48315" cy="113873"/>
+          </a:xfrm>
+          <a:prstGeom prst="triangle">
+            <a:avLst/>
+          </a:prstGeom>
+          <a:solidFill>
+            <a:schemeClr val="bg2">
+              <a:lumMod val="50000"/>
+            </a:schemeClr>
+          </a:solidFill>
+          <a:ln>
+            <a:noFill/>
+          </a:ln>
+        </p:spPr>
+        <p:style>
+          <a:lnRef idx="2">
+            <a:schemeClr val="accent1">
+              <a:shade val="15000"/>
+            </a:schemeClr>
+          </a:lnRef>
+          <a:fillRef idx="1">
+            <a:schemeClr val="accent1"/>
+          </a:fillRef>
+          <a:effectRef idx="0">
+            <a:schemeClr val="accent1"/>
+          </a:effectRef>
+          <a:fontRef idx="minor">
+            <a:schemeClr val="lt1"/>
+          </a:fontRef>
+        </p:style>
+        <p:txBody>
+          <a:bodyPr rtlCol="0" anchor="ctr"/>
+          <a:lstStyle/>
+          <a:p>
+            <a:pPr algn="ctr"/>
+            <a:endParaRPr kumimoji="1" lang="ja-JP" altLang="en-US"/>
+          </a:p>
+        </p:txBody>
+      </p:sp>
+      <p:sp>
+        <p:nvSpPr>
+          <p:cNvPr id="11" name="星: 4 pt 10">
+            <a:extLst>
+              <a:ext uri="{FF2B5EF4-FFF2-40B4-BE49-F238E27FC236}">
+                <a16:creationId xmlns:a16="http://schemas.microsoft.com/office/drawing/2014/main" id="{01D197DF-B40B-9086-4FA4-5F5A1FA957AD}"/>
+              </a:ext>
+            </a:extLst>
+          </p:cNvPr>
+          <p:cNvSpPr/>
+          <p:nvPr/>
+        </p:nvSpPr>
+        <p:spPr>
+          <a:xfrm>
+            <a:off x="9575386" y="1541389"/>
+            <a:ext cx="230404" cy="232403"/>
+          </a:xfrm>
+          <a:prstGeom prst="star4">
+            <a:avLst/>
+          </a:prstGeom>
+          <a:solidFill>
+            <a:srgbClr val="FF0000"/>
+          </a:solidFill>
+          <a:ln>
+            <a:noFill/>
+          </a:ln>
+        </p:spPr>
+        <p:style>
+          <a:lnRef idx="2">
+            <a:schemeClr val="accent1">
+              <a:shade val="15000"/>
+            </a:schemeClr>
+          </a:lnRef>
+          <a:fillRef idx="1">
+            <a:schemeClr val="accent1"/>
+          </a:fillRef>
+          <a:effectRef idx="0">
+            <a:schemeClr val="accent1"/>
+          </a:effectRef>
+          <a:fontRef idx="minor">
+            <a:schemeClr val="lt1"/>
+          </a:fontRef>
+        </p:style>
+        <p:txBody>
+          <a:bodyPr rtlCol="0" anchor="ctr"/>
+          <a:lstStyle/>
+          <a:p>
+            <a:pPr algn="ctr"/>
+            <a:endParaRPr kumimoji="1" lang="ja-JP" altLang="en-US"/>
+          </a:p>
+        </p:txBody>
+      </p:sp>
+      <p:sp>
+        <p:nvSpPr>
+          <p:cNvPr id="9" name="二等辺三角形 8">
+            <a:extLst>
+              <a:ext uri="{FF2B5EF4-FFF2-40B4-BE49-F238E27FC236}">
+                <a16:creationId xmlns:a16="http://schemas.microsoft.com/office/drawing/2014/main" id="{C491FF1F-D4C8-641F-F60E-E8F5A17EFF7E}"/>
+              </a:ext>
+            </a:extLst>
+          </p:cNvPr>
+          <p:cNvSpPr/>
+          <p:nvPr/>
+        </p:nvSpPr>
+        <p:spPr>
+          <a:xfrm rot="13073411">
+            <a:off x="9702683" y="1556635"/>
+            <a:ext cx="48315" cy="113873"/>
+          </a:xfrm>
+          <a:prstGeom prst="triangle">
+            <a:avLst/>
+          </a:prstGeom>
+          <a:solidFill>
+            <a:schemeClr val="bg2">
+              <a:lumMod val="50000"/>
+            </a:schemeClr>
+          </a:solidFill>
+          <a:ln>
+            <a:noFill/>
+          </a:ln>
+        </p:spPr>
+        <p:style>
+          <a:lnRef idx="2">
+            <a:schemeClr val="accent1">
+              <a:shade val="15000"/>
+            </a:schemeClr>
+          </a:lnRef>
+          <a:fillRef idx="1">
+            <a:schemeClr val="accent1"/>
+          </a:fillRef>
+          <a:effectRef idx="0">
+            <a:schemeClr val="accent1"/>
+          </a:effectRef>
+          <a:fontRef idx="minor">
+            <a:schemeClr val="lt1"/>
+          </a:fontRef>
+        </p:style>
+        <p:txBody>
+          <a:bodyPr rtlCol="0" anchor="ctr"/>
+          <a:lstStyle/>
+          <a:p>
+            <a:pPr algn="ctr"/>
+            <a:endParaRPr kumimoji="1" lang="ja-JP" altLang="en-US"/>
+          </a:p>
+        </p:txBody>
+      </p:sp>
+      <p:sp>
+        <p:nvSpPr>
+          <p:cNvPr id="12" name="星: 4 pt 11">
+            <a:extLst>
+              <a:ext uri="{FF2B5EF4-FFF2-40B4-BE49-F238E27FC236}">
+                <a16:creationId xmlns:a16="http://schemas.microsoft.com/office/drawing/2014/main" id="{62110F68-A098-0620-CCF6-53D7FF32AD2A}"/>
+              </a:ext>
+            </a:extLst>
+          </p:cNvPr>
+          <p:cNvSpPr/>
+          <p:nvPr/>
+        </p:nvSpPr>
+        <p:spPr>
+          <a:xfrm>
+            <a:off x="10719968" y="1605761"/>
+            <a:ext cx="102767" cy="103658"/>
+          </a:xfrm>
+          <a:prstGeom prst="star4">
+            <a:avLst/>
+          </a:prstGeom>
+          <a:solidFill>
+            <a:srgbClr val="FF0000"/>
+          </a:solidFill>
+          <a:ln>
+            <a:noFill/>
+          </a:ln>
+        </p:spPr>
+        <p:style>
+          <a:lnRef idx="2">
+            <a:schemeClr val="accent1">
+              <a:shade val="15000"/>
+            </a:schemeClr>
+          </a:lnRef>
+          <a:fillRef idx="1">
+            <a:schemeClr val="accent1"/>
+          </a:fillRef>
+          <a:effectRef idx="0">
+            <a:schemeClr val="accent1"/>
+          </a:effectRef>
+          <a:fontRef idx="minor">
+            <a:schemeClr val="lt1"/>
+          </a:fontRef>
+        </p:style>
+        <p:txBody>
+          <a:bodyPr rtlCol="0" anchor="ctr"/>
+          <a:lstStyle/>
+          <a:p>
+            <a:pPr algn="ctr"/>
+            <a:endParaRPr kumimoji="1" lang="ja-JP" altLang="en-US"/>
+          </a:p>
+        </p:txBody>
+      </p:sp>
+      <p:sp>
+        <p:nvSpPr>
+          <p:cNvPr id="10" name="二等辺三角形 9">
+            <a:extLst>
+              <a:ext uri="{FF2B5EF4-FFF2-40B4-BE49-F238E27FC236}">
+                <a16:creationId xmlns:a16="http://schemas.microsoft.com/office/drawing/2014/main" id="{74C4F49D-88B2-3D0C-53F2-AAAF9DEF7AD7}"/>
+              </a:ext>
+            </a:extLst>
+          </p:cNvPr>
+          <p:cNvSpPr/>
+          <p:nvPr/>
+        </p:nvSpPr>
+        <p:spPr>
+          <a:xfrm rot="13073411">
+            <a:off x="10782331" y="1556635"/>
+            <a:ext cx="48315" cy="113873"/>
+          </a:xfrm>
+          <a:prstGeom prst="triangle">
+            <a:avLst/>
+          </a:prstGeom>
+          <a:solidFill>
+            <a:schemeClr val="bg2">
+              <a:lumMod val="50000"/>
+            </a:schemeClr>
+          </a:solidFill>
+          <a:ln>
+            <a:noFill/>
+          </a:ln>
+        </p:spPr>
+        <p:style>
+          <a:lnRef idx="2">
+            <a:schemeClr val="accent1">
+              <a:shade val="15000"/>
+            </a:schemeClr>
+          </a:lnRef>
+          <a:fillRef idx="1">
+            <a:schemeClr val="accent1"/>
+          </a:fillRef>
+          <a:effectRef idx="0">
+            <a:schemeClr val="accent1"/>
+          </a:effectRef>
+          <a:fontRef idx="minor">
+            <a:schemeClr val="lt1"/>
+          </a:fontRef>
+        </p:style>
+        <p:txBody>
+          <a:bodyPr rtlCol="0" anchor="ctr"/>
+          <a:lstStyle/>
+          <a:p>
+            <a:pPr algn="ctr"/>
+            <a:endParaRPr kumimoji="1" lang="ja-JP" altLang="en-US"/>
+          </a:p>
+        </p:txBody>
+      </p:sp>
     </p:spTree>
     <p:extLst>
       <p:ext uri="{BB962C8B-B14F-4D97-AF65-F5344CB8AC3E}">
